--- a/LabBook_010.pptx
+++ b/LabBook_010.pptx
@@ -274,7 +274,7 @@
           <a:p>
             <a:fld id="{8438F8DC-35B0-48E6-A86E-42F1F08DD00F}" type="datetimeFigureOut">
               <a:rPr lang="es-ES" smtClean="0"/>
-              <a:t>09/02/2026</a:t>
+              <a:t>16/02/2026</a:t>
             </a:fld>
             <a:endParaRPr lang="es-ES"/>
           </a:p>
@@ -451,7 +451,7 @@
           <a:p>
             <a:fld id="{FACBDC12-F39B-4B97-8F4D-6734F9D366FF}" type="datetimeFigureOut">
               <a:rPr lang="es-ES" smtClean="0"/>
-              <a:t>09/02/2026</a:t>
+              <a:t>16/02/2026</a:t>
             </a:fld>
             <a:endParaRPr lang="es-ES"/>
           </a:p>
@@ -6066,7 +6066,7 @@
         <p:spPr>
           <a:xfrm>
             <a:off x="609441" y="4860334"/>
-            <a:ext cx="11199971" cy="1754326"/>
+            <a:ext cx="11199971" cy="1938992"/>
           </a:xfrm>
           <a:prstGeom prst="rect">
             <a:avLst/>
@@ -6749,6 +6749,319 @@
               <a:latin typeface="Arial" panose="020B0604020202020204" pitchFamily="34" charset="0"/>
               <a:cs typeface="Arial" panose="020B0604020202020204" pitchFamily="34" charset="0"/>
             </a:endParaRPr>
+          </a:p>
+          <a:p>
+            <a:pPr algn="just"/>
+            <a:r>
+              <a:rPr lang="en-US" sz="1200" dirty="0">
+                <a:highlight>
+                  <a:srgbClr val="FFFF00"/>
+                </a:highlight>
+                <a:latin typeface="Arial" panose="020B0604020202020204" pitchFamily="34" charset="0"/>
+                <a:cs typeface="Arial" panose="020B0604020202020204" pitchFamily="34" charset="0"/>
+              </a:rPr>
+              <a:t>Bajo </a:t>
+            </a:r>
+            <a:r>
+              <a:rPr lang="en-US" sz="1200" dirty="0" err="1">
+                <a:highlight>
+                  <a:srgbClr val="FFFF00"/>
+                </a:highlight>
+                <a:latin typeface="Arial" panose="020B0604020202020204" pitchFamily="34" charset="0"/>
+                <a:cs typeface="Arial" panose="020B0604020202020204" pitchFamily="34" charset="0"/>
+              </a:rPr>
+              <a:t>contraste</a:t>
+            </a:r>
+            <a:r>
+              <a:rPr lang="en-US" sz="1200" dirty="0">
+                <a:highlight>
+                  <a:srgbClr val="FFFF00"/>
+                </a:highlight>
+                <a:latin typeface="Arial" panose="020B0604020202020204" pitchFamily="34" charset="0"/>
+                <a:cs typeface="Arial" panose="020B0604020202020204" pitchFamily="34" charset="0"/>
+              </a:rPr>
+              <a:t> de </a:t>
+            </a:r>
+            <a:r>
+              <a:rPr lang="en-US" sz="1200" dirty="0" err="1">
+                <a:highlight>
+                  <a:srgbClr val="FFFF00"/>
+                </a:highlight>
+                <a:latin typeface="Arial" panose="020B0604020202020204" pitchFamily="34" charset="0"/>
+                <a:cs typeface="Arial" panose="020B0604020202020204" pitchFamily="34" charset="0"/>
+              </a:rPr>
+              <a:t>índice</a:t>
+            </a:r>
+            <a:r>
+              <a:rPr lang="en-US" sz="1200" dirty="0">
+                <a:highlight>
+                  <a:srgbClr val="FFFF00"/>
+                </a:highlight>
+                <a:latin typeface="Arial" panose="020B0604020202020204" pitchFamily="34" charset="0"/>
+                <a:cs typeface="Arial" panose="020B0604020202020204" pitchFamily="34" charset="0"/>
+              </a:rPr>
+              <a:t> </a:t>
+            </a:r>
+            <a:r>
+              <a:rPr lang="en-US" sz="1200" dirty="0" err="1">
+                <a:highlight>
+                  <a:srgbClr val="FFFF00"/>
+                </a:highlight>
+                <a:latin typeface="Arial" panose="020B0604020202020204" pitchFamily="34" charset="0"/>
+                <a:cs typeface="Arial" panose="020B0604020202020204" pitchFamily="34" charset="0"/>
+              </a:rPr>
+              <a:t>efectivo</a:t>
+            </a:r>
+            <a:r>
+              <a:rPr lang="en-US" sz="1200" dirty="0">
+                <a:highlight>
+                  <a:srgbClr val="FFFF00"/>
+                </a:highlight>
+                <a:latin typeface="Arial" panose="020B0604020202020204" pitchFamily="34" charset="0"/>
+                <a:cs typeface="Arial" panose="020B0604020202020204" pitchFamily="34" charset="0"/>
+              </a:rPr>
+              <a:t> </a:t>
+            </a:r>
+            <a:r>
+              <a:rPr lang="en-US" sz="1200" dirty="0" err="1">
+                <a:highlight>
+                  <a:srgbClr val="FFFF00"/>
+                </a:highlight>
+                <a:latin typeface="Arial" panose="020B0604020202020204" pitchFamily="34" charset="0"/>
+                <a:cs typeface="Arial" panose="020B0604020202020204" pitchFamily="34" charset="0"/>
+              </a:rPr>
+              <a:t>va</a:t>
+            </a:r>
+            <a:r>
+              <a:rPr lang="en-US" sz="1200" dirty="0">
+                <a:highlight>
+                  <a:srgbClr val="FFFF00"/>
+                </a:highlight>
+                <a:latin typeface="Arial" panose="020B0604020202020204" pitchFamily="34" charset="0"/>
+                <a:cs typeface="Arial" panose="020B0604020202020204" pitchFamily="34" charset="0"/>
+              </a:rPr>
+              <a:t> a </a:t>
+            </a:r>
+            <a:r>
+              <a:rPr lang="en-US" sz="1200" dirty="0" err="1">
+                <a:highlight>
+                  <a:srgbClr val="FFFF00"/>
+                </a:highlight>
+                <a:latin typeface="Arial" panose="020B0604020202020204" pitchFamily="34" charset="0"/>
+                <a:cs typeface="Arial" panose="020B0604020202020204" pitchFamily="34" charset="0"/>
+              </a:rPr>
+              <a:t>haber</a:t>
+            </a:r>
+            <a:r>
+              <a:rPr lang="en-US" sz="1200" dirty="0">
+                <a:highlight>
+                  <a:srgbClr val="FFFF00"/>
+                </a:highlight>
+                <a:latin typeface="Arial" panose="020B0604020202020204" pitchFamily="34" charset="0"/>
+                <a:cs typeface="Arial" panose="020B0604020202020204" pitchFamily="34" charset="0"/>
+              </a:rPr>
+              <a:t> </a:t>
+            </a:r>
+            <a:r>
+              <a:rPr lang="en-US" sz="1200" dirty="0" err="1">
+                <a:highlight>
+                  <a:srgbClr val="FFFF00"/>
+                </a:highlight>
+                <a:latin typeface="Arial" panose="020B0604020202020204" pitchFamily="34" charset="0"/>
+                <a:cs typeface="Arial" panose="020B0604020202020204" pitchFamily="34" charset="0"/>
+              </a:rPr>
+              <a:t>menor</a:t>
+            </a:r>
+            <a:r>
+              <a:rPr lang="en-US" sz="1200" dirty="0">
+                <a:highlight>
+                  <a:srgbClr val="FFFF00"/>
+                </a:highlight>
+                <a:latin typeface="Arial" panose="020B0604020202020204" pitchFamily="34" charset="0"/>
+                <a:cs typeface="Arial" panose="020B0604020202020204" pitchFamily="34" charset="0"/>
+              </a:rPr>
+              <a:t> </a:t>
+            </a:r>
+            <a:r>
+              <a:rPr lang="en-US" sz="1200" dirty="0" err="1">
+                <a:highlight>
+                  <a:srgbClr val="FFFF00"/>
+                </a:highlight>
+                <a:latin typeface="Arial" panose="020B0604020202020204" pitchFamily="34" charset="0"/>
+                <a:cs typeface="Arial" panose="020B0604020202020204" pitchFamily="34" charset="0"/>
+              </a:rPr>
+              <a:t>confinamiento</a:t>
+            </a:r>
+            <a:r>
+              <a:rPr lang="en-US" sz="1200" dirty="0">
+                <a:highlight>
+                  <a:srgbClr val="FFFF00"/>
+                </a:highlight>
+                <a:latin typeface="Arial" panose="020B0604020202020204" pitchFamily="34" charset="0"/>
+                <a:cs typeface="Arial" panose="020B0604020202020204" pitchFamily="34" charset="0"/>
+              </a:rPr>
+              <a:t> </a:t>
+            </a:r>
+            <a:r>
+              <a:rPr lang="en-US" sz="1200" dirty="0" err="1">
+                <a:highlight>
+                  <a:srgbClr val="FFFF00"/>
+                </a:highlight>
+                <a:latin typeface="Arial" panose="020B0604020202020204" pitchFamily="34" charset="0"/>
+                <a:cs typeface="Arial" panose="020B0604020202020204" pitchFamily="34" charset="0"/>
+              </a:rPr>
+              <a:t>en</a:t>
+            </a:r>
+            <a:r>
+              <a:rPr lang="en-US" sz="1200" dirty="0">
+                <a:highlight>
+                  <a:srgbClr val="FFFF00"/>
+                </a:highlight>
+                <a:latin typeface="Arial" panose="020B0604020202020204" pitchFamily="34" charset="0"/>
+                <a:cs typeface="Arial" panose="020B0604020202020204" pitchFamily="34" charset="0"/>
+              </a:rPr>
+              <a:t> </a:t>
+            </a:r>
+            <a:r>
+              <a:rPr lang="en-US" sz="1200" dirty="0" err="1">
+                <a:highlight>
+                  <a:srgbClr val="FFFF00"/>
+                </a:highlight>
+                <a:latin typeface="Arial" panose="020B0604020202020204" pitchFamily="34" charset="0"/>
+                <a:cs typeface="Arial" panose="020B0604020202020204" pitchFamily="34" charset="0"/>
+              </a:rPr>
+              <a:t>el</a:t>
+            </a:r>
+            <a:r>
+              <a:rPr lang="en-US" sz="1200" dirty="0">
+                <a:highlight>
+                  <a:srgbClr val="FFFF00"/>
+                </a:highlight>
+                <a:latin typeface="Arial" panose="020B0604020202020204" pitchFamily="34" charset="0"/>
+                <a:cs typeface="Arial" panose="020B0604020202020204" pitchFamily="34" charset="0"/>
+              </a:rPr>
+              <a:t> </a:t>
+            </a:r>
+            <a:r>
+              <a:rPr lang="en-US" sz="1200" dirty="0" err="1">
+                <a:highlight>
+                  <a:srgbClr val="FFFF00"/>
+                </a:highlight>
+                <a:latin typeface="Arial" panose="020B0604020202020204" pitchFamily="34" charset="0"/>
+                <a:cs typeface="Arial" panose="020B0604020202020204" pitchFamily="34" charset="0"/>
+              </a:rPr>
+              <a:t>nucleo</a:t>
+            </a:r>
+            <a:r>
+              <a:rPr lang="en-US" sz="1200" dirty="0">
+                <a:highlight>
+                  <a:srgbClr val="FFFF00"/>
+                </a:highlight>
+                <a:latin typeface="Arial" panose="020B0604020202020204" pitchFamily="34" charset="0"/>
+                <a:cs typeface="Arial" panose="020B0604020202020204" pitchFamily="34" charset="0"/>
+              </a:rPr>
+              <a:t>. </a:t>
+            </a:r>
+            <a:r>
+              <a:rPr lang="en-US" sz="1200" dirty="0" err="1">
+                <a:highlight>
+                  <a:srgbClr val="FFFF00"/>
+                </a:highlight>
+                <a:latin typeface="Arial" panose="020B0604020202020204" pitchFamily="34" charset="0"/>
+                <a:cs typeface="Arial" panose="020B0604020202020204" pitchFamily="34" charset="0"/>
+              </a:rPr>
+              <a:t>Va</a:t>
+            </a:r>
+            <a:r>
+              <a:rPr lang="en-US" sz="1200" dirty="0">
+                <a:highlight>
+                  <a:srgbClr val="FFFF00"/>
+                </a:highlight>
+                <a:latin typeface="Arial" panose="020B0604020202020204" pitchFamily="34" charset="0"/>
+                <a:cs typeface="Arial" panose="020B0604020202020204" pitchFamily="34" charset="0"/>
+              </a:rPr>
+              <a:t> a </a:t>
+            </a:r>
+            <a:r>
+              <a:rPr lang="en-US" sz="1200" dirty="0" err="1">
+                <a:highlight>
+                  <a:srgbClr val="FFFF00"/>
+                </a:highlight>
+                <a:latin typeface="Arial" panose="020B0604020202020204" pitchFamily="34" charset="0"/>
+                <a:cs typeface="Arial" panose="020B0604020202020204" pitchFamily="34" charset="0"/>
+              </a:rPr>
+              <a:t>haber</a:t>
+            </a:r>
+            <a:r>
+              <a:rPr lang="en-US" sz="1200" dirty="0">
+                <a:highlight>
+                  <a:srgbClr val="FFFF00"/>
+                </a:highlight>
+                <a:latin typeface="Arial" panose="020B0604020202020204" pitchFamily="34" charset="0"/>
+                <a:cs typeface="Arial" panose="020B0604020202020204" pitchFamily="34" charset="0"/>
+              </a:rPr>
+              <a:t> </a:t>
+            </a:r>
+            <a:r>
+              <a:rPr lang="en-US" sz="1200" dirty="0" err="1">
+                <a:highlight>
+                  <a:srgbClr val="FFFF00"/>
+                </a:highlight>
+                <a:latin typeface="Arial" panose="020B0604020202020204" pitchFamily="34" charset="0"/>
+                <a:cs typeface="Arial" panose="020B0604020202020204" pitchFamily="34" charset="0"/>
+              </a:rPr>
+              <a:t>parte</a:t>
+            </a:r>
+            <a:r>
+              <a:rPr lang="en-US" sz="1200" dirty="0">
+                <a:highlight>
+                  <a:srgbClr val="FFFF00"/>
+                </a:highlight>
+                <a:latin typeface="Arial" panose="020B0604020202020204" pitchFamily="34" charset="0"/>
+                <a:cs typeface="Arial" panose="020B0604020202020204" pitchFamily="34" charset="0"/>
+              </a:rPr>
+              <a:t> que se </a:t>
+            </a:r>
+            <a:r>
+              <a:rPr lang="en-US" sz="1200" dirty="0" err="1">
+                <a:highlight>
+                  <a:srgbClr val="FFFF00"/>
+                </a:highlight>
+                <a:latin typeface="Arial" panose="020B0604020202020204" pitchFamily="34" charset="0"/>
+                <a:cs typeface="Arial" panose="020B0604020202020204" pitchFamily="34" charset="0"/>
+              </a:rPr>
+              <a:t>propague</a:t>
+            </a:r>
+            <a:r>
+              <a:rPr lang="en-US" sz="1200" dirty="0">
+                <a:highlight>
+                  <a:srgbClr val="FFFF00"/>
+                </a:highlight>
+                <a:latin typeface="Arial" panose="020B0604020202020204" pitchFamily="34" charset="0"/>
+                <a:cs typeface="Arial" panose="020B0604020202020204" pitchFamily="34" charset="0"/>
+              </a:rPr>
+              <a:t> por </a:t>
+            </a:r>
+            <a:r>
+              <a:rPr lang="en-US" sz="1200" dirty="0" err="1">
+                <a:highlight>
+                  <a:srgbClr val="FFFF00"/>
+                </a:highlight>
+                <a:latin typeface="Arial" panose="020B0604020202020204" pitchFamily="34" charset="0"/>
+                <a:cs typeface="Arial" panose="020B0604020202020204" pitchFamily="34" charset="0"/>
+              </a:rPr>
+              <a:t>el</a:t>
+            </a:r>
+            <a:r>
+              <a:rPr lang="en-US" sz="1200" dirty="0">
+                <a:highlight>
+                  <a:srgbClr val="FFFF00"/>
+                </a:highlight>
+                <a:latin typeface="Arial" panose="020B0604020202020204" pitchFamily="34" charset="0"/>
+                <a:cs typeface="Arial" panose="020B0604020202020204" pitchFamily="34" charset="0"/>
+              </a:rPr>
+              <a:t> cladding.</a:t>
+            </a:r>
           </a:p>
         </p:txBody>
       </p:sp>

--- a/LabBook_010.pptx
+++ b/LabBook_010.pptx
@@ -274,7 +274,7 @@
           <a:p>
             <a:fld id="{8438F8DC-35B0-48E6-A86E-42F1F08DD00F}" type="datetimeFigureOut">
               <a:rPr lang="es-ES" smtClean="0"/>
-              <a:t>16/02/2026</a:t>
+              <a:t>23/2/26</a:t>
             </a:fld>
             <a:endParaRPr lang="es-ES"/>
           </a:p>
@@ -451,7 +451,7 @@
           <a:p>
             <a:fld id="{FACBDC12-F39B-4B97-8F4D-6734F9D366FF}" type="datetimeFigureOut">
               <a:rPr lang="es-ES" smtClean="0"/>
-              <a:t>16/02/2026</a:t>
+              <a:t>23/2/26</a:t>
             </a:fld>
             <a:endParaRPr lang="es-ES"/>
           </a:p>
@@ -5792,33 +5792,8 @@
                 <a:latin typeface="Arial" panose="020B0604020202020204" pitchFamily="34" charset="0"/>
                 <a:cs typeface="Arial" panose="020B0604020202020204" pitchFamily="34" charset="0"/>
               </a:rPr>
-              <a:t>Document all your results (neff, plot fields </a:t>
-            </a:r>
-            <a:r>
-              <a:rPr lang="en-US" sz="1200">
-                <a:latin typeface="Arial" panose="020B0604020202020204" pitchFamily="34" charset="0"/>
-                <a:cs typeface="Arial" panose="020B0604020202020204" pitchFamily="34" charset="0"/>
-              </a:rPr>
-              <a:t>of different modes, </a:t>
-            </a:r>
-            <a:r>
-              <a:rPr lang="en-US" sz="1200" dirty="0">
-                <a:latin typeface="Arial" panose="020B0604020202020204" pitchFamily="34" charset="0"/>
-                <a:cs typeface="Arial" panose="020B0604020202020204" pitchFamily="34" charset="0"/>
-              </a:rPr>
-              <a:t>comparison between </a:t>
-            </a:r>
-            <a:r>
-              <a:rPr lang="en-US" sz="1200">
-                <a:latin typeface="Arial" panose="020B0604020202020204" pitchFamily="34" charset="0"/>
-                <a:cs typeface="Arial" panose="020B0604020202020204" pitchFamily="34" charset="0"/>
-              </a:rPr>
-              <a:t>different polarizations…)</a:t>
-            </a:r>
-            <a:endParaRPr lang="en-US" sz="1200" dirty="0">
-              <a:latin typeface="Arial" panose="020B0604020202020204" pitchFamily="34" charset="0"/>
-              <a:cs typeface="Arial" panose="020B0604020202020204" pitchFamily="34" charset="0"/>
-            </a:endParaRPr>
+              <a:t>Document all your results (neff, plot fields of different modes, comparison between different polarizations…)</a:t>
+            </a:r>
           </a:p>
           <a:p>
             <a:pPr algn="just"/>
@@ -5981,7 +5956,7 @@
         </p:blipFill>
         <p:spPr>
           <a:xfrm>
-            <a:off x="5045006" y="6356057"/>
+            <a:off x="5045165" y="6156884"/>
             <a:ext cx="6409575" cy="363174"/>
           </a:xfrm>
           <a:prstGeom prst="rect">
@@ -6034,7 +6009,12 @@
             <p:ph type="ftr" sz="quarter" idx="5"/>
           </p:nvPr>
         </p:nvSpPr>
-        <p:spPr/>
+        <p:spPr>
+          <a:xfrm>
+            <a:off x="609759" y="6257884"/>
+            <a:ext cx="2743200" cy="184666"/>
+          </a:xfrm>
+        </p:spPr>
         <p:txBody>
           <a:bodyPr/>
           <a:lstStyle/>
@@ -6065,8 +6045,8 @@
         </p:nvSpPr>
         <p:spPr>
           <a:xfrm>
-            <a:off x="609441" y="4860334"/>
-            <a:ext cx="11199971" cy="1938992"/>
+            <a:off x="609600" y="4661161"/>
+            <a:ext cx="11199971" cy="2123658"/>
           </a:xfrm>
           <a:prstGeom prst="rect">
             <a:avLst/>
@@ -6090,7 +6070,7 @@
           <a:p>
             <a:pPr algn="just"/>
             <a:r>
-              <a:rPr lang="en-US" sz="1200" dirty="0">
+              <a:rPr lang="en-US" sz="1100" dirty="0">
                 <a:latin typeface="Arial" panose="020B0604020202020204" pitchFamily="34" charset="0"/>
                 <a:cs typeface="Arial" panose="020B0604020202020204" pitchFamily="34" charset="0"/>
               </a:rPr>
@@ -6099,7 +6079,7 @@
           </a:p>
           <a:p>
             <a:pPr algn="just"/>
-            <a:endParaRPr lang="en-US" sz="1200" dirty="0">
+            <a:endParaRPr lang="es-ES_tradnl" sz="1100" dirty="0">
               <a:latin typeface="Arial" panose="020B0604020202020204" pitchFamily="34" charset="0"/>
               <a:cs typeface="Arial" panose="020B0604020202020204" pitchFamily="34" charset="0"/>
             </a:endParaRPr>
@@ -6107,960 +6087,185 @@
           <a:p>
             <a:pPr algn="just"/>
             <a:r>
-              <a:rPr lang="en-US" sz="1200" dirty="0">
+              <a:rPr lang="es-ES_tradnl" sz="1100" dirty="0">
                 <a:latin typeface="Arial" panose="020B0604020202020204" pitchFamily="34" charset="0"/>
                 <a:cs typeface="Arial" panose="020B0604020202020204" pitchFamily="34" charset="0"/>
               </a:rPr>
-              <a:t>Podemos </a:t>
-            </a:r>
-            <a:r>
-              <a:rPr lang="en-US" sz="1200" dirty="0" err="1">
+              <a:t>En primer lugar, podemos observar en ambas gráficas que el índice efectivo disminuye a medida que aumenta la longitud de onda para todos los modos. Esto ocurre porque, a mayores longitudes de onda, el modo óptico aumenta su tamaño y pierde confinamiento en el núcleo. Al estar menos confinado, una mayor fracción del campo electromagnético penetra y viaja por el </a:t>
+            </a:r>
+            <a:r>
+              <a:rPr lang="es-ES_tradnl" sz="1100" dirty="0" err="1">
                 <a:latin typeface="Arial" panose="020B0604020202020204" pitchFamily="34" charset="0"/>
                 <a:cs typeface="Arial" panose="020B0604020202020204" pitchFamily="34" charset="0"/>
               </a:rPr>
-              <a:t>observar</a:t>
-            </a:r>
-            <a:r>
-              <a:rPr lang="en-US" sz="1200" dirty="0">
+              <a:t>cladding</a:t>
+            </a:r>
+            <a:r>
+              <a:rPr lang="es-ES_tradnl" sz="1100" dirty="0">
                 <a:latin typeface="Arial" panose="020B0604020202020204" pitchFamily="34" charset="0"/>
                 <a:cs typeface="Arial" panose="020B0604020202020204" pitchFamily="34" charset="0"/>
               </a:rPr>
-              <a:t> que para </a:t>
-            </a:r>
-            <a:r>
-              <a:rPr lang="en-US" sz="1200" dirty="0" err="1">
+              <a:t> (SiO2), el cual tiene un índice de refracción menor, haciendo que el índice efectivo global del modo decaiga.</a:t>
+            </a:r>
+          </a:p>
+          <a:p>
+            <a:pPr algn="just"/>
+            <a:endParaRPr lang="es-ES_tradnl" sz="1100" dirty="0">
+              <a:latin typeface="Arial" panose="020B0604020202020204" pitchFamily="34" charset="0"/>
+              <a:cs typeface="Arial" panose="020B0604020202020204" pitchFamily="34" charset="0"/>
+            </a:endParaRPr>
+          </a:p>
+          <a:p>
+            <a:pPr algn="just"/>
+            <a:r>
+              <a:rPr lang="es-ES_tradnl" sz="1100" dirty="0">
                 <a:latin typeface="Arial" panose="020B0604020202020204" pitchFamily="34" charset="0"/>
                 <a:cs typeface="Arial" panose="020B0604020202020204" pitchFamily="34" charset="0"/>
               </a:rPr>
-              <a:t>el</a:t>
-            </a:r>
-            <a:r>
-              <a:rPr lang="en-US" sz="1200" dirty="0">
+              <a:t>Por otra parte, podemos observar que para el caso de la </a:t>
+            </a:r>
+            <a:r>
+              <a:rPr lang="es-ES_tradnl" sz="1100" dirty="0" err="1">
+                <a:latin typeface="Arial" panose="020B0604020202020204" pitchFamily="34" charset="0"/>
+                <a:cs typeface="Arial" panose="020B0604020202020204" pitchFamily="34" charset="0"/>
+              </a:rPr>
+              <a:t>shallow</a:t>
+            </a:r>
+            <a:r>
+              <a:rPr lang="es-ES_tradnl" sz="1100" dirty="0">
                 <a:latin typeface="Arial" panose="020B0604020202020204" pitchFamily="34" charset="0"/>
                 <a:cs typeface="Arial" panose="020B0604020202020204" pitchFamily="34" charset="0"/>
               </a:rPr>
               <a:t> </a:t>
             </a:r>
             <a:r>
-              <a:rPr lang="en-US" sz="1200" dirty="0" err="1">
+              <a:rPr lang="es-ES_tradnl" sz="1100" dirty="0" err="1">
                 <a:latin typeface="Arial" panose="020B0604020202020204" pitchFamily="34" charset="0"/>
                 <a:cs typeface="Arial" panose="020B0604020202020204" pitchFamily="34" charset="0"/>
               </a:rPr>
-              <a:t>caso</a:t>
-            </a:r>
-            <a:r>
-              <a:rPr lang="en-US" sz="1200" dirty="0">
+              <a:t>waveguide</a:t>
+            </a:r>
+            <a:r>
+              <a:rPr lang="es-ES_tradnl" sz="1100" dirty="0">
                 <a:latin typeface="Arial" panose="020B0604020202020204" pitchFamily="34" charset="0"/>
                 <a:cs typeface="Arial" panose="020B0604020202020204" pitchFamily="34" charset="0"/>
               </a:rPr>
-              <a:t> de la shallow waveguide hay una </a:t>
-            </a:r>
-            <a:r>
-              <a:rPr lang="en-US" sz="1200" dirty="0" err="1">
+              <a:t> hay una propagación de los 4 modos analizados, ya que tienen un índice efectivo mayor al índice efectivo del </a:t>
+            </a:r>
+            <a:r>
+              <a:rPr lang="es-ES_tradnl" sz="1100" dirty="0" err="1">
                 <a:latin typeface="Arial" panose="020B0604020202020204" pitchFamily="34" charset="0"/>
                 <a:cs typeface="Arial" panose="020B0604020202020204" pitchFamily="34" charset="0"/>
               </a:rPr>
-              <a:t>propagación</a:t>
-            </a:r>
-            <a:r>
-              <a:rPr lang="en-US" sz="1200" dirty="0">
+              <a:t>cladding</a:t>
+            </a:r>
+            <a:r>
+              <a:rPr lang="es-ES_tradnl" sz="1100" dirty="0">
                 <a:latin typeface="Arial" panose="020B0604020202020204" pitchFamily="34" charset="0"/>
                 <a:cs typeface="Arial" panose="020B0604020202020204" pitchFamily="34" charset="0"/>
               </a:rPr>
-              <a:t> de los 4 </a:t>
-            </a:r>
-            <a:r>
-              <a:rPr lang="en-US" sz="1200" dirty="0" err="1">
+              <a:t>. Esto se debe a que tiene un mayor espacio la guía y se pueden propagar modos de orden mayor.</a:t>
+            </a:r>
+          </a:p>
+          <a:p>
+            <a:pPr algn="just"/>
+            <a:endParaRPr lang="es-ES_tradnl" sz="1100" dirty="0">
+              <a:latin typeface="Arial" panose="020B0604020202020204" pitchFamily="34" charset="0"/>
+              <a:cs typeface="Arial" panose="020B0604020202020204" pitchFamily="34" charset="0"/>
+            </a:endParaRPr>
+          </a:p>
+          <a:p>
+            <a:pPr algn="just"/>
+            <a:r>
+              <a:rPr lang="es-ES_tradnl" sz="1100" dirty="0">
                 <a:latin typeface="Arial" panose="020B0604020202020204" pitchFamily="34" charset="0"/>
                 <a:cs typeface="Arial" panose="020B0604020202020204" pitchFamily="34" charset="0"/>
               </a:rPr>
-              <a:t>modos</a:t>
-            </a:r>
-            <a:r>
-              <a:rPr lang="en-US" sz="1200" dirty="0">
+              <a:t>En el caso de la </a:t>
+            </a:r>
+            <a:r>
+              <a:rPr lang="es-ES_tradnl" sz="1100" dirty="0" err="1">
+                <a:latin typeface="Arial" panose="020B0604020202020204" pitchFamily="34" charset="0"/>
+                <a:cs typeface="Arial" panose="020B0604020202020204" pitchFamily="34" charset="0"/>
+              </a:rPr>
+              <a:t>deep</a:t>
+            </a:r>
+            <a:r>
+              <a:rPr lang="es-ES_tradnl" sz="1100" dirty="0">
                 <a:latin typeface="Arial" panose="020B0604020202020204" pitchFamily="34" charset="0"/>
                 <a:cs typeface="Arial" panose="020B0604020202020204" pitchFamily="34" charset="0"/>
               </a:rPr>
               <a:t> </a:t>
             </a:r>
             <a:r>
-              <a:rPr lang="en-US" sz="1200" dirty="0" err="1">
+              <a:rPr lang="es-ES_tradnl" sz="1100" dirty="0" err="1">
                 <a:latin typeface="Arial" panose="020B0604020202020204" pitchFamily="34" charset="0"/>
                 <a:cs typeface="Arial" panose="020B0604020202020204" pitchFamily="34" charset="0"/>
               </a:rPr>
-              <a:t>analizados</a:t>
-            </a:r>
-            <a:r>
-              <a:rPr lang="en-US" sz="1200" dirty="0">
+              <a:t>waveguide</a:t>
+            </a:r>
+            <a:r>
+              <a:rPr lang="es-ES_tradnl" sz="1100" dirty="0">
                 <a:latin typeface="Arial" panose="020B0604020202020204" pitchFamily="34" charset="0"/>
                 <a:cs typeface="Arial" panose="020B0604020202020204" pitchFamily="34" charset="0"/>
               </a:rPr>
-              <a:t>, </a:t>
-            </a:r>
-            <a:r>
-              <a:rPr lang="en-US" sz="1200" dirty="0" err="1">
+              <a:t> se puede </a:t>
+            </a:r>
+            <a:r>
+              <a:rPr lang="es-ES_tradnl" sz="1100" dirty="0" err="1">
                 <a:latin typeface="Arial" panose="020B0604020202020204" pitchFamily="34" charset="0"/>
                 <a:cs typeface="Arial" panose="020B0604020202020204" pitchFamily="34" charset="0"/>
               </a:rPr>
-              <a:t>ya</a:t>
-            </a:r>
-            <a:r>
-              <a:rPr lang="en-US" sz="1200" dirty="0">
+              <a:t>observer</a:t>
+            </a:r>
+            <a:r>
+              <a:rPr lang="es-ES_tradnl" sz="1100" dirty="0">
                 <a:latin typeface="Arial" panose="020B0604020202020204" pitchFamily="34" charset="0"/>
                 <a:cs typeface="Arial" panose="020B0604020202020204" pitchFamily="34" charset="0"/>
               </a:rPr>
-              <a:t> que </a:t>
-            </a:r>
-            <a:r>
-              <a:rPr lang="en-US" sz="1200" dirty="0" err="1">
+              <a:t> que hay dos modos que no se propagan, los correspondientes al índice 2 y 3 de la solución, los cuales corresponden a los modos de orden mayor. Esto es debido a que sus índices efectivos son inferiores a los del </a:t>
+            </a:r>
+            <a:r>
+              <a:rPr lang="es-ES_tradnl" sz="1100" dirty="0" err="1">
                 <a:latin typeface="Arial" panose="020B0604020202020204" pitchFamily="34" charset="0"/>
                 <a:cs typeface="Arial" panose="020B0604020202020204" pitchFamily="34" charset="0"/>
               </a:rPr>
-              <a:t>tienen</a:t>
-            </a:r>
-            <a:r>
-              <a:rPr lang="en-US" sz="1200" dirty="0">
+              <a:t>cladding</a:t>
+            </a:r>
+            <a:r>
+              <a:rPr lang="es-ES_tradnl" sz="1100" dirty="0">
                 <a:latin typeface="Arial" panose="020B0604020202020204" pitchFamily="34" charset="0"/>
                 <a:cs typeface="Arial" panose="020B0604020202020204" pitchFamily="34" charset="0"/>
               </a:rPr>
-              <a:t> un </a:t>
-            </a:r>
-            <a:r>
-              <a:rPr lang="en-US" sz="1200" dirty="0" err="1">
+              <a:t>, lo cual hace que </a:t>
+            </a:r>
+            <a:r>
+              <a:rPr lang="es-ES_tradnl" sz="1100" dirty="0" err="1">
                 <a:latin typeface="Arial" panose="020B0604020202020204" pitchFamily="34" charset="0"/>
                 <a:cs typeface="Arial" panose="020B0604020202020204" pitchFamily="34" charset="0"/>
               </a:rPr>
-              <a:t>índice</a:t>
-            </a:r>
-            <a:r>
-              <a:rPr lang="en-US" sz="1200" dirty="0">
+              <a:t>esten</a:t>
+            </a:r>
+            <a:r>
+              <a:rPr lang="es-ES_tradnl" sz="1100" dirty="0">
                 <a:latin typeface="Arial" panose="020B0604020202020204" pitchFamily="34" charset="0"/>
                 <a:cs typeface="Arial" panose="020B0604020202020204" pitchFamily="34" charset="0"/>
               </a:rPr>
-              <a:t> </a:t>
-            </a:r>
-            <a:r>
-              <a:rPr lang="en-US" sz="1200" dirty="0" err="1">
+              <a:t> en corte. Solo los modos de orden inferior (0 y 1), al tener un índice efectivo mayor, se propagarán adecuadamente al estar más confinados dentro del </a:t>
+            </a:r>
+            <a:r>
+              <a:rPr lang="es-ES_tradnl" sz="1100" dirty="0" err="1">
                 <a:latin typeface="Arial" panose="020B0604020202020204" pitchFamily="34" charset="0"/>
                 <a:cs typeface="Arial" panose="020B0604020202020204" pitchFamily="34" charset="0"/>
               </a:rPr>
-              <a:t>efectivo</a:t>
-            </a:r>
-            <a:r>
-              <a:rPr lang="en-US" sz="1200" dirty="0">
+              <a:t>core</a:t>
+            </a:r>
+            <a:r>
+              <a:rPr lang="es-ES_tradnl" sz="1100" dirty="0">
                 <a:latin typeface="Arial" panose="020B0604020202020204" pitchFamily="34" charset="0"/>
                 <a:cs typeface="Arial" panose="020B0604020202020204" pitchFamily="34" charset="0"/>
               </a:rPr>
-              <a:t> mayor al </a:t>
-            </a:r>
-            <a:r>
-              <a:rPr lang="en-US" sz="1200" dirty="0" err="1">
-                <a:latin typeface="Arial" panose="020B0604020202020204" pitchFamily="34" charset="0"/>
-                <a:cs typeface="Arial" panose="020B0604020202020204" pitchFamily="34" charset="0"/>
-              </a:rPr>
-              <a:t>índice</a:t>
-            </a:r>
-            <a:r>
-              <a:rPr lang="en-US" sz="1200" dirty="0">
-                <a:latin typeface="Arial" panose="020B0604020202020204" pitchFamily="34" charset="0"/>
-                <a:cs typeface="Arial" panose="020B0604020202020204" pitchFamily="34" charset="0"/>
-              </a:rPr>
-              <a:t> </a:t>
-            </a:r>
-            <a:r>
-              <a:rPr lang="en-US" sz="1200" dirty="0" err="1">
-                <a:latin typeface="Arial" panose="020B0604020202020204" pitchFamily="34" charset="0"/>
-                <a:cs typeface="Arial" panose="020B0604020202020204" pitchFamily="34" charset="0"/>
-              </a:rPr>
-              <a:t>efectivo</a:t>
-            </a:r>
-            <a:r>
-              <a:rPr lang="en-US" sz="1200" dirty="0">
-                <a:latin typeface="Arial" panose="020B0604020202020204" pitchFamily="34" charset="0"/>
-                <a:cs typeface="Arial" panose="020B0604020202020204" pitchFamily="34" charset="0"/>
-              </a:rPr>
-              <a:t> del cladding (SiO2). </a:t>
-            </a:r>
-            <a:r>
-              <a:rPr lang="en-US" sz="1200" dirty="0" err="1">
-                <a:latin typeface="Arial" panose="020B0604020202020204" pitchFamily="34" charset="0"/>
-                <a:cs typeface="Arial" panose="020B0604020202020204" pitchFamily="34" charset="0"/>
-              </a:rPr>
-              <a:t>Esto</a:t>
-            </a:r>
-            <a:r>
-              <a:rPr lang="en-US" sz="1200" dirty="0">
-                <a:latin typeface="Arial" panose="020B0604020202020204" pitchFamily="34" charset="0"/>
-                <a:cs typeface="Arial" panose="020B0604020202020204" pitchFamily="34" charset="0"/>
-              </a:rPr>
-              <a:t> se debe a que </a:t>
-            </a:r>
-            <a:r>
-              <a:rPr lang="en-US" sz="1200" dirty="0" err="1">
-                <a:latin typeface="Arial" panose="020B0604020202020204" pitchFamily="34" charset="0"/>
-                <a:cs typeface="Arial" panose="020B0604020202020204" pitchFamily="34" charset="0"/>
-              </a:rPr>
-              <a:t>tiene</a:t>
-            </a:r>
-            <a:r>
-              <a:rPr lang="en-US" sz="1200" dirty="0">
-                <a:latin typeface="Arial" panose="020B0604020202020204" pitchFamily="34" charset="0"/>
-                <a:cs typeface="Arial" panose="020B0604020202020204" pitchFamily="34" charset="0"/>
-              </a:rPr>
-              <a:t> un mayor </a:t>
-            </a:r>
-            <a:r>
-              <a:rPr lang="en-US" sz="1200" dirty="0" err="1">
-                <a:latin typeface="Arial" panose="020B0604020202020204" pitchFamily="34" charset="0"/>
-                <a:cs typeface="Arial" panose="020B0604020202020204" pitchFamily="34" charset="0"/>
-              </a:rPr>
-              <a:t>espacio</a:t>
-            </a:r>
-            <a:r>
-              <a:rPr lang="en-US" sz="1200" dirty="0">
-                <a:latin typeface="Arial" panose="020B0604020202020204" pitchFamily="34" charset="0"/>
-                <a:cs typeface="Arial" panose="020B0604020202020204" pitchFamily="34" charset="0"/>
-              </a:rPr>
-              <a:t> la </a:t>
-            </a:r>
-            <a:r>
-              <a:rPr lang="en-US" sz="1200" dirty="0" err="1">
-                <a:latin typeface="Arial" panose="020B0604020202020204" pitchFamily="34" charset="0"/>
-                <a:cs typeface="Arial" panose="020B0604020202020204" pitchFamily="34" charset="0"/>
-              </a:rPr>
-              <a:t>guía</a:t>
-            </a:r>
-            <a:r>
-              <a:rPr lang="en-US" sz="1200" dirty="0">
-                <a:latin typeface="Arial" panose="020B0604020202020204" pitchFamily="34" charset="0"/>
-                <a:cs typeface="Arial" panose="020B0604020202020204" pitchFamily="34" charset="0"/>
-              </a:rPr>
-              <a:t> y se </a:t>
-            </a:r>
-            <a:r>
-              <a:rPr lang="en-US" sz="1200" dirty="0" err="1">
-                <a:latin typeface="Arial" panose="020B0604020202020204" pitchFamily="34" charset="0"/>
-                <a:cs typeface="Arial" panose="020B0604020202020204" pitchFamily="34" charset="0"/>
-              </a:rPr>
-              <a:t>pueden</a:t>
-            </a:r>
-            <a:r>
-              <a:rPr lang="en-US" sz="1200" dirty="0">
-                <a:latin typeface="Arial" panose="020B0604020202020204" pitchFamily="34" charset="0"/>
-                <a:cs typeface="Arial" panose="020B0604020202020204" pitchFamily="34" charset="0"/>
-              </a:rPr>
-              <a:t> </a:t>
-            </a:r>
-            <a:r>
-              <a:rPr lang="en-US" sz="1200" dirty="0" err="1">
-                <a:latin typeface="Arial" panose="020B0604020202020204" pitchFamily="34" charset="0"/>
-                <a:cs typeface="Arial" panose="020B0604020202020204" pitchFamily="34" charset="0"/>
-              </a:rPr>
-              <a:t>propagar</a:t>
-            </a:r>
-            <a:r>
-              <a:rPr lang="en-US" sz="1200" dirty="0">
-                <a:latin typeface="Arial" panose="020B0604020202020204" pitchFamily="34" charset="0"/>
-                <a:cs typeface="Arial" panose="020B0604020202020204" pitchFamily="34" charset="0"/>
-              </a:rPr>
-              <a:t> </a:t>
-            </a:r>
-            <a:r>
-              <a:rPr lang="en-US" sz="1200" dirty="0" err="1">
-                <a:latin typeface="Arial" panose="020B0604020202020204" pitchFamily="34" charset="0"/>
-                <a:cs typeface="Arial" panose="020B0604020202020204" pitchFamily="34" charset="0"/>
-              </a:rPr>
-              <a:t>modos</a:t>
-            </a:r>
-            <a:r>
-              <a:rPr lang="en-US" sz="1200" dirty="0">
-                <a:latin typeface="Arial" panose="020B0604020202020204" pitchFamily="34" charset="0"/>
-                <a:cs typeface="Arial" panose="020B0604020202020204" pitchFamily="34" charset="0"/>
-              </a:rPr>
-              <a:t> de </a:t>
-            </a:r>
-            <a:r>
-              <a:rPr lang="en-US" sz="1200" dirty="0" err="1">
-                <a:latin typeface="Arial" panose="020B0604020202020204" pitchFamily="34" charset="0"/>
-                <a:cs typeface="Arial" panose="020B0604020202020204" pitchFamily="34" charset="0"/>
-              </a:rPr>
-              <a:t>orden</a:t>
-            </a:r>
-            <a:r>
-              <a:rPr lang="en-US" sz="1200" dirty="0">
-                <a:latin typeface="Arial" panose="020B0604020202020204" pitchFamily="34" charset="0"/>
-                <a:cs typeface="Arial" panose="020B0604020202020204" pitchFamily="34" charset="0"/>
-              </a:rPr>
-              <a:t> mayor.</a:t>
-            </a:r>
-          </a:p>
-          <a:p>
-            <a:pPr algn="just"/>
-            <a:endParaRPr lang="en-US" sz="1200" dirty="0">
-              <a:latin typeface="Arial" panose="020B0604020202020204" pitchFamily="34" charset="0"/>
-              <a:cs typeface="Arial" panose="020B0604020202020204" pitchFamily="34" charset="0"/>
-            </a:endParaRPr>
-          </a:p>
-          <a:p>
-            <a:pPr algn="just"/>
-            <a:r>
-              <a:rPr lang="en-US" sz="1200" dirty="0">
-                <a:latin typeface="Arial" panose="020B0604020202020204" pitchFamily="34" charset="0"/>
-                <a:cs typeface="Arial" panose="020B0604020202020204" pitchFamily="34" charset="0"/>
-              </a:rPr>
-              <a:t>Por </a:t>
-            </a:r>
-            <a:r>
-              <a:rPr lang="en-US" sz="1200" dirty="0" err="1">
-                <a:latin typeface="Arial" panose="020B0604020202020204" pitchFamily="34" charset="0"/>
-                <a:cs typeface="Arial" panose="020B0604020202020204" pitchFamily="34" charset="0"/>
-              </a:rPr>
-              <a:t>otra</a:t>
-            </a:r>
-            <a:r>
-              <a:rPr lang="en-US" sz="1200" dirty="0">
-                <a:latin typeface="Arial" panose="020B0604020202020204" pitchFamily="34" charset="0"/>
-                <a:cs typeface="Arial" panose="020B0604020202020204" pitchFamily="34" charset="0"/>
-              </a:rPr>
-              <a:t> </a:t>
-            </a:r>
-            <a:r>
-              <a:rPr lang="en-US" sz="1200" dirty="0" err="1">
-                <a:latin typeface="Arial" panose="020B0604020202020204" pitchFamily="34" charset="0"/>
-                <a:cs typeface="Arial" panose="020B0604020202020204" pitchFamily="34" charset="0"/>
-              </a:rPr>
-              <a:t>parte</a:t>
-            </a:r>
-            <a:r>
-              <a:rPr lang="en-US" sz="1200" dirty="0">
-                <a:latin typeface="Arial" panose="020B0604020202020204" pitchFamily="34" charset="0"/>
-                <a:cs typeface="Arial" panose="020B0604020202020204" pitchFamily="34" charset="0"/>
-              </a:rPr>
-              <a:t>, </a:t>
-            </a:r>
-            <a:r>
-              <a:rPr lang="en-US" sz="1200" dirty="0" err="1">
-                <a:latin typeface="Arial" panose="020B0604020202020204" pitchFamily="34" charset="0"/>
-                <a:cs typeface="Arial" panose="020B0604020202020204" pitchFamily="34" charset="0"/>
-              </a:rPr>
-              <a:t>en</a:t>
-            </a:r>
-            <a:r>
-              <a:rPr lang="en-US" sz="1200" dirty="0">
-                <a:latin typeface="Arial" panose="020B0604020202020204" pitchFamily="34" charset="0"/>
-                <a:cs typeface="Arial" panose="020B0604020202020204" pitchFamily="34" charset="0"/>
-              </a:rPr>
-              <a:t> la deep waveguide se </a:t>
-            </a:r>
-            <a:r>
-              <a:rPr lang="en-US" sz="1200" dirty="0" err="1">
-                <a:latin typeface="Arial" panose="020B0604020202020204" pitchFamily="34" charset="0"/>
-                <a:cs typeface="Arial" panose="020B0604020202020204" pitchFamily="34" charset="0"/>
-              </a:rPr>
-              <a:t>puede</a:t>
-            </a:r>
-            <a:r>
-              <a:rPr lang="en-US" sz="1200" dirty="0">
-                <a:latin typeface="Arial" panose="020B0604020202020204" pitchFamily="34" charset="0"/>
-                <a:cs typeface="Arial" panose="020B0604020202020204" pitchFamily="34" charset="0"/>
-              </a:rPr>
-              <a:t> observer que hay dos </a:t>
-            </a:r>
-            <a:r>
-              <a:rPr lang="en-US" sz="1200" dirty="0" err="1">
-                <a:latin typeface="Arial" panose="020B0604020202020204" pitchFamily="34" charset="0"/>
-                <a:cs typeface="Arial" panose="020B0604020202020204" pitchFamily="34" charset="0"/>
-              </a:rPr>
-              <a:t>modos</a:t>
-            </a:r>
-            <a:r>
-              <a:rPr lang="en-US" sz="1200" dirty="0">
-                <a:latin typeface="Arial" panose="020B0604020202020204" pitchFamily="34" charset="0"/>
-                <a:cs typeface="Arial" panose="020B0604020202020204" pitchFamily="34" charset="0"/>
-              </a:rPr>
-              <a:t> que no se </a:t>
-            </a:r>
-            <a:r>
-              <a:rPr lang="en-US" sz="1200" dirty="0" err="1">
-                <a:latin typeface="Arial" panose="020B0604020202020204" pitchFamily="34" charset="0"/>
-                <a:cs typeface="Arial" panose="020B0604020202020204" pitchFamily="34" charset="0"/>
-              </a:rPr>
-              <a:t>propagarán</a:t>
-            </a:r>
-            <a:r>
-              <a:rPr lang="en-US" sz="1200" dirty="0">
-                <a:latin typeface="Arial" panose="020B0604020202020204" pitchFamily="34" charset="0"/>
-                <a:cs typeface="Arial" panose="020B0604020202020204" pitchFamily="34" charset="0"/>
-              </a:rPr>
-              <a:t>, los </a:t>
-            </a:r>
-            <a:r>
-              <a:rPr lang="en-US" sz="1200" dirty="0" err="1">
-                <a:latin typeface="Arial" panose="020B0604020202020204" pitchFamily="34" charset="0"/>
-                <a:cs typeface="Arial" panose="020B0604020202020204" pitchFamily="34" charset="0"/>
-              </a:rPr>
-              <a:t>correspondientes</a:t>
-            </a:r>
-            <a:r>
-              <a:rPr lang="en-US" sz="1200" dirty="0">
-                <a:latin typeface="Arial" panose="020B0604020202020204" pitchFamily="34" charset="0"/>
-                <a:cs typeface="Arial" panose="020B0604020202020204" pitchFamily="34" charset="0"/>
-              </a:rPr>
-              <a:t> al </a:t>
-            </a:r>
-            <a:r>
-              <a:rPr lang="en-US" sz="1200" dirty="0" err="1">
-                <a:latin typeface="Arial" panose="020B0604020202020204" pitchFamily="34" charset="0"/>
-                <a:cs typeface="Arial" panose="020B0604020202020204" pitchFamily="34" charset="0"/>
-              </a:rPr>
-              <a:t>índice</a:t>
-            </a:r>
-            <a:r>
-              <a:rPr lang="en-US" sz="1200" dirty="0">
-                <a:latin typeface="Arial" panose="020B0604020202020204" pitchFamily="34" charset="0"/>
-                <a:cs typeface="Arial" panose="020B0604020202020204" pitchFamily="34" charset="0"/>
-              </a:rPr>
-              <a:t> 2 y 3 de la </a:t>
-            </a:r>
-            <a:r>
-              <a:rPr lang="en-US" sz="1200" dirty="0" err="1">
-                <a:latin typeface="Arial" panose="020B0604020202020204" pitchFamily="34" charset="0"/>
-                <a:cs typeface="Arial" panose="020B0604020202020204" pitchFamily="34" charset="0"/>
-              </a:rPr>
-              <a:t>solución</a:t>
-            </a:r>
-            <a:r>
-              <a:rPr lang="en-US" sz="1200" dirty="0">
-                <a:latin typeface="Arial" panose="020B0604020202020204" pitchFamily="34" charset="0"/>
-                <a:cs typeface="Arial" panose="020B0604020202020204" pitchFamily="34" charset="0"/>
-              </a:rPr>
-              <a:t>, los </a:t>
-            </a:r>
-            <a:r>
-              <a:rPr lang="en-US" sz="1200" dirty="0" err="1">
-                <a:latin typeface="Arial" panose="020B0604020202020204" pitchFamily="34" charset="0"/>
-                <a:cs typeface="Arial" panose="020B0604020202020204" pitchFamily="34" charset="0"/>
-              </a:rPr>
-              <a:t>cuales</a:t>
-            </a:r>
-            <a:r>
-              <a:rPr lang="en-US" sz="1200" dirty="0">
-                <a:latin typeface="Arial" panose="020B0604020202020204" pitchFamily="34" charset="0"/>
-                <a:cs typeface="Arial" panose="020B0604020202020204" pitchFamily="34" charset="0"/>
-              </a:rPr>
-              <a:t> </a:t>
-            </a:r>
-            <a:r>
-              <a:rPr lang="en-US" sz="1200" dirty="0" err="1">
-                <a:latin typeface="Arial" panose="020B0604020202020204" pitchFamily="34" charset="0"/>
-                <a:cs typeface="Arial" panose="020B0604020202020204" pitchFamily="34" charset="0"/>
-              </a:rPr>
-              <a:t>corresponden</a:t>
-            </a:r>
-            <a:r>
-              <a:rPr lang="en-US" sz="1200" dirty="0">
-                <a:latin typeface="Arial" panose="020B0604020202020204" pitchFamily="34" charset="0"/>
-                <a:cs typeface="Arial" panose="020B0604020202020204" pitchFamily="34" charset="0"/>
-              </a:rPr>
-              <a:t> a los </a:t>
-            </a:r>
-            <a:r>
-              <a:rPr lang="en-US" sz="1200" dirty="0" err="1">
-                <a:latin typeface="Arial" panose="020B0604020202020204" pitchFamily="34" charset="0"/>
-                <a:cs typeface="Arial" panose="020B0604020202020204" pitchFamily="34" charset="0"/>
-              </a:rPr>
-              <a:t>modos</a:t>
-            </a:r>
-            <a:r>
-              <a:rPr lang="en-US" sz="1200" dirty="0">
-                <a:latin typeface="Arial" panose="020B0604020202020204" pitchFamily="34" charset="0"/>
-                <a:cs typeface="Arial" panose="020B0604020202020204" pitchFamily="34" charset="0"/>
-              </a:rPr>
-              <a:t> de </a:t>
-            </a:r>
-            <a:r>
-              <a:rPr lang="en-US" sz="1200" dirty="0" err="1">
-                <a:latin typeface="Arial" panose="020B0604020202020204" pitchFamily="34" charset="0"/>
-                <a:cs typeface="Arial" panose="020B0604020202020204" pitchFamily="34" charset="0"/>
-              </a:rPr>
-              <a:t>orden</a:t>
-            </a:r>
-            <a:r>
-              <a:rPr lang="en-US" sz="1200" dirty="0">
-                <a:latin typeface="Arial" panose="020B0604020202020204" pitchFamily="34" charset="0"/>
-                <a:cs typeface="Arial" panose="020B0604020202020204" pitchFamily="34" charset="0"/>
-              </a:rPr>
-              <a:t> mayor. </a:t>
-            </a:r>
-            <a:r>
-              <a:rPr lang="en-US" sz="1200" dirty="0" err="1">
-                <a:latin typeface="Arial" panose="020B0604020202020204" pitchFamily="34" charset="0"/>
-                <a:cs typeface="Arial" panose="020B0604020202020204" pitchFamily="34" charset="0"/>
-              </a:rPr>
-              <a:t>Esto</a:t>
-            </a:r>
-            <a:r>
-              <a:rPr lang="en-US" sz="1200" dirty="0">
-                <a:latin typeface="Arial" panose="020B0604020202020204" pitchFamily="34" charset="0"/>
-                <a:cs typeface="Arial" panose="020B0604020202020204" pitchFamily="34" charset="0"/>
-              </a:rPr>
-              <a:t> es </a:t>
-            </a:r>
-            <a:r>
-              <a:rPr lang="en-US" sz="1200" dirty="0" err="1">
-                <a:latin typeface="Arial" panose="020B0604020202020204" pitchFamily="34" charset="0"/>
-                <a:cs typeface="Arial" panose="020B0604020202020204" pitchFamily="34" charset="0"/>
-              </a:rPr>
-              <a:t>debido</a:t>
-            </a:r>
-            <a:r>
-              <a:rPr lang="en-US" sz="1200" dirty="0">
-                <a:latin typeface="Arial" panose="020B0604020202020204" pitchFamily="34" charset="0"/>
-                <a:cs typeface="Arial" panose="020B0604020202020204" pitchFamily="34" charset="0"/>
-              </a:rPr>
-              <a:t> a que los </a:t>
-            </a:r>
-            <a:r>
-              <a:rPr lang="en-US" sz="1200" dirty="0" err="1">
-                <a:latin typeface="Arial" panose="020B0604020202020204" pitchFamily="34" charset="0"/>
-                <a:cs typeface="Arial" panose="020B0604020202020204" pitchFamily="34" charset="0"/>
-              </a:rPr>
-              <a:t>índices</a:t>
-            </a:r>
-            <a:r>
-              <a:rPr lang="en-US" sz="1200" dirty="0">
-                <a:latin typeface="Arial" panose="020B0604020202020204" pitchFamily="34" charset="0"/>
-                <a:cs typeface="Arial" panose="020B0604020202020204" pitchFamily="34" charset="0"/>
-              </a:rPr>
-              <a:t> </a:t>
-            </a:r>
-            <a:r>
-              <a:rPr lang="en-US" sz="1200" dirty="0" err="1">
-                <a:latin typeface="Arial" panose="020B0604020202020204" pitchFamily="34" charset="0"/>
-                <a:cs typeface="Arial" panose="020B0604020202020204" pitchFamily="34" charset="0"/>
-              </a:rPr>
-              <a:t>efectivos</a:t>
-            </a:r>
-            <a:r>
-              <a:rPr lang="en-US" sz="1200" dirty="0">
-                <a:latin typeface="Arial" panose="020B0604020202020204" pitchFamily="34" charset="0"/>
-                <a:cs typeface="Arial" panose="020B0604020202020204" pitchFamily="34" charset="0"/>
-              </a:rPr>
-              <a:t> </a:t>
-            </a:r>
-          </a:p>
-          <a:p>
-            <a:pPr algn="just"/>
-            <a:r>
-              <a:rPr lang="en-US" sz="1200" dirty="0">
-                <a:latin typeface="Arial" panose="020B0604020202020204" pitchFamily="34" charset="0"/>
-                <a:cs typeface="Arial" panose="020B0604020202020204" pitchFamily="34" charset="0"/>
-              </a:rPr>
-              <a:t>Los </a:t>
-            </a:r>
-            <a:r>
-              <a:rPr lang="en-US" sz="1200" dirty="0" err="1">
-                <a:latin typeface="Arial" panose="020B0604020202020204" pitchFamily="34" charset="0"/>
-                <a:cs typeface="Arial" panose="020B0604020202020204" pitchFamily="34" charset="0"/>
-              </a:rPr>
-              <a:t>modos</a:t>
-            </a:r>
-            <a:r>
-              <a:rPr lang="en-US" sz="1200" dirty="0">
-                <a:latin typeface="Arial" panose="020B0604020202020204" pitchFamily="34" charset="0"/>
-                <a:cs typeface="Arial" panose="020B0604020202020204" pitchFamily="34" charset="0"/>
-              </a:rPr>
-              <a:t> con </a:t>
-            </a:r>
-            <a:r>
-              <a:rPr lang="en-US" sz="1200" dirty="0" err="1">
-                <a:latin typeface="Arial" panose="020B0604020202020204" pitchFamily="34" charset="0"/>
-                <a:cs typeface="Arial" panose="020B0604020202020204" pitchFamily="34" charset="0"/>
-              </a:rPr>
-              <a:t>índice</a:t>
-            </a:r>
-            <a:r>
-              <a:rPr lang="en-US" sz="1200" dirty="0">
-                <a:latin typeface="Arial" panose="020B0604020202020204" pitchFamily="34" charset="0"/>
-                <a:cs typeface="Arial" panose="020B0604020202020204" pitchFamily="34" charset="0"/>
-              </a:rPr>
-              <a:t> </a:t>
-            </a:r>
-            <a:r>
-              <a:rPr lang="en-US" sz="1200" dirty="0" err="1">
-                <a:latin typeface="Arial" panose="020B0604020202020204" pitchFamily="34" charset="0"/>
-                <a:cs typeface="Arial" panose="020B0604020202020204" pitchFamily="34" charset="0"/>
-              </a:rPr>
-              <a:t>efectivo</a:t>
-            </a:r>
-            <a:r>
-              <a:rPr lang="en-US" sz="1200" dirty="0">
-                <a:latin typeface="Arial" panose="020B0604020202020204" pitchFamily="34" charset="0"/>
-                <a:cs typeface="Arial" panose="020B0604020202020204" pitchFamily="34" charset="0"/>
-              </a:rPr>
-              <a:t> mayor se </a:t>
-            </a:r>
-            <a:r>
-              <a:rPr lang="en-US" sz="1200" dirty="0" err="1">
-                <a:latin typeface="Arial" panose="020B0604020202020204" pitchFamily="34" charset="0"/>
-                <a:cs typeface="Arial" panose="020B0604020202020204" pitchFamily="34" charset="0"/>
-              </a:rPr>
-              <a:t>propagarán</a:t>
-            </a:r>
-            <a:r>
-              <a:rPr lang="en-US" sz="1200" dirty="0">
-                <a:latin typeface="Arial" panose="020B0604020202020204" pitchFamily="34" charset="0"/>
-                <a:cs typeface="Arial" panose="020B0604020202020204" pitchFamily="34" charset="0"/>
-              </a:rPr>
-              <a:t> </a:t>
-            </a:r>
-            <a:r>
-              <a:rPr lang="en-US" sz="1200" dirty="0" err="1">
-                <a:latin typeface="Arial" panose="020B0604020202020204" pitchFamily="34" charset="0"/>
-                <a:cs typeface="Arial" panose="020B0604020202020204" pitchFamily="34" charset="0"/>
-              </a:rPr>
-              <a:t>más</a:t>
-            </a:r>
-            <a:r>
-              <a:rPr lang="en-US" sz="1200" dirty="0">
-                <a:latin typeface="Arial" panose="020B0604020202020204" pitchFamily="34" charset="0"/>
-                <a:cs typeface="Arial" panose="020B0604020202020204" pitchFamily="34" charset="0"/>
-              </a:rPr>
-              <a:t> </a:t>
-            </a:r>
-            <a:r>
-              <a:rPr lang="en-US" sz="1200" dirty="0" err="1">
-                <a:latin typeface="Arial" panose="020B0604020202020204" pitchFamily="34" charset="0"/>
-                <a:cs typeface="Arial" panose="020B0604020202020204" pitchFamily="34" charset="0"/>
-              </a:rPr>
-              <a:t>confinados</a:t>
-            </a:r>
-            <a:r>
-              <a:rPr lang="en-US" sz="1200" dirty="0">
-                <a:latin typeface="Arial" panose="020B0604020202020204" pitchFamily="34" charset="0"/>
-                <a:cs typeface="Arial" panose="020B0604020202020204" pitchFamily="34" charset="0"/>
-              </a:rPr>
-              <a:t> dentro del core.</a:t>
-            </a:r>
-          </a:p>
-          <a:p>
-            <a:pPr algn="just"/>
-            <a:endParaRPr lang="en-US" sz="1200" dirty="0">
-              <a:latin typeface="Arial" panose="020B0604020202020204" pitchFamily="34" charset="0"/>
-              <a:cs typeface="Arial" panose="020B0604020202020204" pitchFamily="34" charset="0"/>
-            </a:endParaRPr>
-          </a:p>
-          <a:p>
-            <a:pPr algn="just"/>
-            <a:r>
-              <a:rPr lang="en-US" sz="1200" dirty="0">
-                <a:highlight>
-                  <a:srgbClr val="FFFF00"/>
-                </a:highlight>
-                <a:latin typeface="Arial" panose="020B0604020202020204" pitchFamily="34" charset="0"/>
-                <a:cs typeface="Arial" panose="020B0604020202020204" pitchFamily="34" charset="0"/>
-              </a:rPr>
-              <a:t>Bajo </a:t>
-            </a:r>
-            <a:r>
-              <a:rPr lang="en-US" sz="1200" dirty="0" err="1">
-                <a:highlight>
-                  <a:srgbClr val="FFFF00"/>
-                </a:highlight>
-                <a:latin typeface="Arial" panose="020B0604020202020204" pitchFamily="34" charset="0"/>
-                <a:cs typeface="Arial" panose="020B0604020202020204" pitchFamily="34" charset="0"/>
-              </a:rPr>
-              <a:t>contraste</a:t>
-            </a:r>
-            <a:r>
-              <a:rPr lang="en-US" sz="1200" dirty="0">
-                <a:highlight>
-                  <a:srgbClr val="FFFF00"/>
-                </a:highlight>
-                <a:latin typeface="Arial" panose="020B0604020202020204" pitchFamily="34" charset="0"/>
-                <a:cs typeface="Arial" panose="020B0604020202020204" pitchFamily="34" charset="0"/>
-              </a:rPr>
-              <a:t> de </a:t>
-            </a:r>
-            <a:r>
-              <a:rPr lang="en-US" sz="1200" dirty="0" err="1">
-                <a:highlight>
-                  <a:srgbClr val="FFFF00"/>
-                </a:highlight>
-                <a:latin typeface="Arial" panose="020B0604020202020204" pitchFamily="34" charset="0"/>
-                <a:cs typeface="Arial" panose="020B0604020202020204" pitchFamily="34" charset="0"/>
-              </a:rPr>
-              <a:t>índice</a:t>
-            </a:r>
-            <a:r>
-              <a:rPr lang="en-US" sz="1200" dirty="0">
-                <a:highlight>
-                  <a:srgbClr val="FFFF00"/>
-                </a:highlight>
-                <a:latin typeface="Arial" panose="020B0604020202020204" pitchFamily="34" charset="0"/>
-                <a:cs typeface="Arial" panose="020B0604020202020204" pitchFamily="34" charset="0"/>
-              </a:rPr>
-              <a:t> </a:t>
-            </a:r>
-            <a:r>
-              <a:rPr lang="en-US" sz="1200" dirty="0" err="1">
-                <a:highlight>
-                  <a:srgbClr val="FFFF00"/>
-                </a:highlight>
-                <a:latin typeface="Arial" panose="020B0604020202020204" pitchFamily="34" charset="0"/>
-                <a:cs typeface="Arial" panose="020B0604020202020204" pitchFamily="34" charset="0"/>
-              </a:rPr>
-              <a:t>efectivo</a:t>
-            </a:r>
-            <a:r>
-              <a:rPr lang="en-US" sz="1200" dirty="0">
-                <a:highlight>
-                  <a:srgbClr val="FFFF00"/>
-                </a:highlight>
-                <a:latin typeface="Arial" panose="020B0604020202020204" pitchFamily="34" charset="0"/>
-                <a:cs typeface="Arial" panose="020B0604020202020204" pitchFamily="34" charset="0"/>
-              </a:rPr>
-              <a:t> </a:t>
-            </a:r>
-            <a:r>
-              <a:rPr lang="en-US" sz="1200" dirty="0" err="1">
-                <a:highlight>
-                  <a:srgbClr val="FFFF00"/>
-                </a:highlight>
-                <a:latin typeface="Arial" panose="020B0604020202020204" pitchFamily="34" charset="0"/>
-                <a:cs typeface="Arial" panose="020B0604020202020204" pitchFamily="34" charset="0"/>
-              </a:rPr>
-              <a:t>va</a:t>
-            </a:r>
-            <a:r>
-              <a:rPr lang="en-US" sz="1200" dirty="0">
-                <a:highlight>
-                  <a:srgbClr val="FFFF00"/>
-                </a:highlight>
-                <a:latin typeface="Arial" panose="020B0604020202020204" pitchFamily="34" charset="0"/>
-                <a:cs typeface="Arial" panose="020B0604020202020204" pitchFamily="34" charset="0"/>
-              </a:rPr>
-              <a:t> a </a:t>
-            </a:r>
-            <a:r>
-              <a:rPr lang="en-US" sz="1200" dirty="0" err="1">
-                <a:highlight>
-                  <a:srgbClr val="FFFF00"/>
-                </a:highlight>
-                <a:latin typeface="Arial" panose="020B0604020202020204" pitchFamily="34" charset="0"/>
-                <a:cs typeface="Arial" panose="020B0604020202020204" pitchFamily="34" charset="0"/>
-              </a:rPr>
-              <a:t>haber</a:t>
-            </a:r>
-            <a:r>
-              <a:rPr lang="en-US" sz="1200" dirty="0">
-                <a:highlight>
-                  <a:srgbClr val="FFFF00"/>
-                </a:highlight>
-                <a:latin typeface="Arial" panose="020B0604020202020204" pitchFamily="34" charset="0"/>
-                <a:cs typeface="Arial" panose="020B0604020202020204" pitchFamily="34" charset="0"/>
-              </a:rPr>
-              <a:t> </a:t>
-            </a:r>
-            <a:r>
-              <a:rPr lang="en-US" sz="1200" dirty="0" err="1">
-                <a:highlight>
-                  <a:srgbClr val="FFFF00"/>
-                </a:highlight>
-                <a:latin typeface="Arial" panose="020B0604020202020204" pitchFamily="34" charset="0"/>
-                <a:cs typeface="Arial" panose="020B0604020202020204" pitchFamily="34" charset="0"/>
-              </a:rPr>
-              <a:t>menor</a:t>
-            </a:r>
-            <a:r>
-              <a:rPr lang="en-US" sz="1200" dirty="0">
-                <a:highlight>
-                  <a:srgbClr val="FFFF00"/>
-                </a:highlight>
-                <a:latin typeface="Arial" panose="020B0604020202020204" pitchFamily="34" charset="0"/>
-                <a:cs typeface="Arial" panose="020B0604020202020204" pitchFamily="34" charset="0"/>
-              </a:rPr>
-              <a:t> </a:t>
-            </a:r>
-            <a:r>
-              <a:rPr lang="en-US" sz="1200" dirty="0" err="1">
-                <a:highlight>
-                  <a:srgbClr val="FFFF00"/>
-                </a:highlight>
-                <a:latin typeface="Arial" panose="020B0604020202020204" pitchFamily="34" charset="0"/>
-                <a:cs typeface="Arial" panose="020B0604020202020204" pitchFamily="34" charset="0"/>
-              </a:rPr>
-              <a:t>confinamiento</a:t>
-            </a:r>
-            <a:r>
-              <a:rPr lang="en-US" sz="1200" dirty="0">
-                <a:highlight>
-                  <a:srgbClr val="FFFF00"/>
-                </a:highlight>
-                <a:latin typeface="Arial" panose="020B0604020202020204" pitchFamily="34" charset="0"/>
-                <a:cs typeface="Arial" panose="020B0604020202020204" pitchFamily="34" charset="0"/>
-              </a:rPr>
-              <a:t> </a:t>
-            </a:r>
-            <a:r>
-              <a:rPr lang="en-US" sz="1200" dirty="0" err="1">
-                <a:highlight>
-                  <a:srgbClr val="FFFF00"/>
-                </a:highlight>
-                <a:latin typeface="Arial" panose="020B0604020202020204" pitchFamily="34" charset="0"/>
-                <a:cs typeface="Arial" panose="020B0604020202020204" pitchFamily="34" charset="0"/>
-              </a:rPr>
-              <a:t>en</a:t>
-            </a:r>
-            <a:r>
-              <a:rPr lang="en-US" sz="1200" dirty="0">
-                <a:highlight>
-                  <a:srgbClr val="FFFF00"/>
-                </a:highlight>
-                <a:latin typeface="Arial" panose="020B0604020202020204" pitchFamily="34" charset="0"/>
-                <a:cs typeface="Arial" panose="020B0604020202020204" pitchFamily="34" charset="0"/>
-              </a:rPr>
-              <a:t> </a:t>
-            </a:r>
-            <a:r>
-              <a:rPr lang="en-US" sz="1200" dirty="0" err="1">
-                <a:highlight>
-                  <a:srgbClr val="FFFF00"/>
-                </a:highlight>
-                <a:latin typeface="Arial" panose="020B0604020202020204" pitchFamily="34" charset="0"/>
-                <a:cs typeface="Arial" panose="020B0604020202020204" pitchFamily="34" charset="0"/>
-              </a:rPr>
-              <a:t>el</a:t>
-            </a:r>
-            <a:r>
-              <a:rPr lang="en-US" sz="1200" dirty="0">
-                <a:highlight>
-                  <a:srgbClr val="FFFF00"/>
-                </a:highlight>
-                <a:latin typeface="Arial" panose="020B0604020202020204" pitchFamily="34" charset="0"/>
-                <a:cs typeface="Arial" panose="020B0604020202020204" pitchFamily="34" charset="0"/>
-              </a:rPr>
-              <a:t> </a:t>
-            </a:r>
-            <a:r>
-              <a:rPr lang="en-US" sz="1200" dirty="0" err="1">
-                <a:highlight>
-                  <a:srgbClr val="FFFF00"/>
-                </a:highlight>
-                <a:latin typeface="Arial" panose="020B0604020202020204" pitchFamily="34" charset="0"/>
-                <a:cs typeface="Arial" panose="020B0604020202020204" pitchFamily="34" charset="0"/>
-              </a:rPr>
-              <a:t>nucleo</a:t>
-            </a:r>
-            <a:r>
-              <a:rPr lang="en-US" sz="1200" dirty="0">
-                <a:highlight>
-                  <a:srgbClr val="FFFF00"/>
-                </a:highlight>
-                <a:latin typeface="Arial" panose="020B0604020202020204" pitchFamily="34" charset="0"/>
-                <a:cs typeface="Arial" panose="020B0604020202020204" pitchFamily="34" charset="0"/>
-              </a:rPr>
-              <a:t>. </a:t>
-            </a:r>
-            <a:r>
-              <a:rPr lang="en-US" sz="1200" dirty="0" err="1">
-                <a:highlight>
-                  <a:srgbClr val="FFFF00"/>
-                </a:highlight>
-                <a:latin typeface="Arial" panose="020B0604020202020204" pitchFamily="34" charset="0"/>
-                <a:cs typeface="Arial" panose="020B0604020202020204" pitchFamily="34" charset="0"/>
-              </a:rPr>
-              <a:t>Va</a:t>
-            </a:r>
-            <a:r>
-              <a:rPr lang="en-US" sz="1200" dirty="0">
-                <a:highlight>
-                  <a:srgbClr val="FFFF00"/>
-                </a:highlight>
-                <a:latin typeface="Arial" panose="020B0604020202020204" pitchFamily="34" charset="0"/>
-                <a:cs typeface="Arial" panose="020B0604020202020204" pitchFamily="34" charset="0"/>
-              </a:rPr>
-              <a:t> a </a:t>
-            </a:r>
-            <a:r>
-              <a:rPr lang="en-US" sz="1200" dirty="0" err="1">
-                <a:highlight>
-                  <a:srgbClr val="FFFF00"/>
-                </a:highlight>
-                <a:latin typeface="Arial" panose="020B0604020202020204" pitchFamily="34" charset="0"/>
-                <a:cs typeface="Arial" panose="020B0604020202020204" pitchFamily="34" charset="0"/>
-              </a:rPr>
-              <a:t>haber</a:t>
-            </a:r>
-            <a:r>
-              <a:rPr lang="en-US" sz="1200" dirty="0">
-                <a:highlight>
-                  <a:srgbClr val="FFFF00"/>
-                </a:highlight>
-                <a:latin typeface="Arial" panose="020B0604020202020204" pitchFamily="34" charset="0"/>
-                <a:cs typeface="Arial" panose="020B0604020202020204" pitchFamily="34" charset="0"/>
-              </a:rPr>
-              <a:t> </a:t>
-            </a:r>
-            <a:r>
-              <a:rPr lang="en-US" sz="1200" dirty="0" err="1">
-                <a:highlight>
-                  <a:srgbClr val="FFFF00"/>
-                </a:highlight>
-                <a:latin typeface="Arial" panose="020B0604020202020204" pitchFamily="34" charset="0"/>
-                <a:cs typeface="Arial" panose="020B0604020202020204" pitchFamily="34" charset="0"/>
-              </a:rPr>
-              <a:t>parte</a:t>
-            </a:r>
-            <a:r>
-              <a:rPr lang="en-US" sz="1200" dirty="0">
-                <a:highlight>
-                  <a:srgbClr val="FFFF00"/>
-                </a:highlight>
-                <a:latin typeface="Arial" panose="020B0604020202020204" pitchFamily="34" charset="0"/>
-                <a:cs typeface="Arial" panose="020B0604020202020204" pitchFamily="34" charset="0"/>
-              </a:rPr>
-              <a:t> que se </a:t>
-            </a:r>
-            <a:r>
-              <a:rPr lang="en-US" sz="1200" dirty="0" err="1">
-                <a:highlight>
-                  <a:srgbClr val="FFFF00"/>
-                </a:highlight>
-                <a:latin typeface="Arial" panose="020B0604020202020204" pitchFamily="34" charset="0"/>
-                <a:cs typeface="Arial" panose="020B0604020202020204" pitchFamily="34" charset="0"/>
-              </a:rPr>
-              <a:t>propague</a:t>
-            </a:r>
-            <a:r>
-              <a:rPr lang="en-US" sz="1200" dirty="0">
-                <a:highlight>
-                  <a:srgbClr val="FFFF00"/>
-                </a:highlight>
-                <a:latin typeface="Arial" panose="020B0604020202020204" pitchFamily="34" charset="0"/>
-                <a:cs typeface="Arial" panose="020B0604020202020204" pitchFamily="34" charset="0"/>
-              </a:rPr>
-              <a:t> por </a:t>
-            </a:r>
-            <a:r>
-              <a:rPr lang="en-US" sz="1200" dirty="0" err="1">
-                <a:highlight>
-                  <a:srgbClr val="FFFF00"/>
-                </a:highlight>
-                <a:latin typeface="Arial" panose="020B0604020202020204" pitchFamily="34" charset="0"/>
-                <a:cs typeface="Arial" panose="020B0604020202020204" pitchFamily="34" charset="0"/>
-              </a:rPr>
-              <a:t>el</a:t>
-            </a:r>
-            <a:r>
-              <a:rPr lang="en-US" sz="1200" dirty="0">
-                <a:highlight>
-                  <a:srgbClr val="FFFF00"/>
-                </a:highlight>
-                <a:latin typeface="Arial" panose="020B0604020202020204" pitchFamily="34" charset="0"/>
-                <a:cs typeface="Arial" panose="020B0604020202020204" pitchFamily="34" charset="0"/>
-              </a:rPr>
-              <a:t> cladding.</a:t>
+              <a:t>.</a:t>
             </a:r>
           </a:p>
         </p:txBody>
@@ -7079,7 +6284,7 @@
         </p:nvSpPr>
         <p:spPr>
           <a:xfrm>
-            <a:off x="609441" y="1418373"/>
+            <a:off x="609600" y="1219200"/>
             <a:ext cx="5332571" cy="3306028"/>
           </a:xfrm>
           <a:prstGeom prst="rect">
@@ -7131,7 +6336,7 @@
         </p:nvSpPr>
         <p:spPr>
           <a:xfrm>
-            <a:off x="2284365" y="2671278"/>
+            <a:off x="2284524" y="2472105"/>
             <a:ext cx="1982722" cy="1477328"/>
           </a:xfrm>
           <a:prstGeom prst="rect">
@@ -7201,7 +6406,7 @@
         </p:nvSpPr>
         <p:spPr>
           <a:xfrm>
-            <a:off x="6476841" y="1418373"/>
+            <a:off x="6477000" y="1219200"/>
             <a:ext cx="5332571" cy="3306028"/>
           </a:xfrm>
           <a:prstGeom prst="rect">
@@ -7253,7 +6458,7 @@
         </p:nvSpPr>
         <p:spPr>
           <a:xfrm>
-            <a:off x="8151766" y="2671278"/>
+            <a:off x="8151925" y="2472105"/>
             <a:ext cx="1982722" cy="1477328"/>
           </a:xfrm>
           <a:prstGeom prst="rect">
@@ -7323,7 +6528,7 @@
         </p:nvSpPr>
         <p:spPr>
           <a:xfrm>
-            <a:off x="642989" y="4402885"/>
+            <a:off x="643148" y="4203712"/>
             <a:ext cx="2269787" cy="369332"/>
           </a:xfrm>
           <a:prstGeom prst="rect">
@@ -7367,7 +6572,7 @@
         </p:blipFill>
         <p:spPr>
           <a:xfrm>
-            <a:off x="6663391" y="1603209"/>
+            <a:off x="6663550" y="1404036"/>
             <a:ext cx="5033752" cy="2936355"/>
           </a:xfrm>
           <a:prstGeom prst="rect">
@@ -7397,7 +6602,7 @@
         </p:blipFill>
         <p:spPr>
           <a:xfrm>
-            <a:off x="711201" y="1517126"/>
+            <a:off x="711360" y="1317953"/>
             <a:ext cx="5080000" cy="2963333"/>
           </a:xfrm>
           <a:prstGeom prst="rect">

--- a/LabBook_010.pptx
+++ b/LabBook_010.pptx
@@ -5,17 +5,18 @@
     <p:sldMasterId id="2147483648" r:id="rId1"/>
   </p:sldMasterIdLst>
   <p:notesMasterIdLst>
-    <p:notesMasterId r:id="rId7"/>
+    <p:notesMasterId r:id="rId8"/>
   </p:notesMasterIdLst>
   <p:handoutMasterIdLst>
-    <p:handoutMasterId r:id="rId8"/>
+    <p:handoutMasterId r:id="rId9"/>
   </p:handoutMasterIdLst>
   <p:sldIdLst>
     <p:sldId id="256" r:id="rId2"/>
     <p:sldId id="289" r:id="rId3"/>
     <p:sldId id="290" r:id="rId4"/>
-    <p:sldId id="291" r:id="rId5"/>
-    <p:sldId id="288" r:id="rId6"/>
+    <p:sldId id="292" r:id="rId5"/>
+    <p:sldId id="291" r:id="rId6"/>
+    <p:sldId id="288" r:id="rId7"/>
   </p:sldIdLst>
   <p:sldSz cx="12192000" cy="6858000"/>
   <p:notesSz cx="12192000" cy="6858000"/>
@@ -274,7 +275,7 @@
           <a:p>
             <a:fld id="{8438F8DC-35B0-48E6-A86E-42F1F08DD00F}" type="datetimeFigureOut">
               <a:rPr lang="es-ES" smtClean="0"/>
-              <a:t>23/2/26</a:t>
+              <a:t>02/03/2026</a:t>
             </a:fld>
             <a:endParaRPr lang="es-ES"/>
           </a:p>
@@ -451,7 +452,7 @@
           <a:p>
             <a:fld id="{FACBDC12-F39B-4B97-8F4D-6734F9D366FF}" type="datetimeFigureOut">
               <a:rPr lang="es-ES" smtClean="0"/>
-              <a:t>23/2/26</a:t>
+              <a:t>02/03/2026</a:t>
             </a:fld>
             <a:endParaRPr lang="es-ES"/>
           </a:p>
@@ -891,7 +892,7 @@
           <a:p>
             <a:fld id="{676223B9-C868-4436-87D9-1A3152E1157A}" type="slidenum">
               <a:rPr lang="es-ES" smtClean="0"/>
-              <a:t>4</a:t>
+              <a:t>5</a:t>
             </a:fld>
             <a:endParaRPr lang="es-ES"/>
           </a:p>
@@ -2427,7 +2428,21 @@
                 <a:latin typeface="Arial"/>
                 <a:cs typeface="Arial"/>
               </a:rPr>
-              <a:t>: </a:t>
+              <a:t>: Sergi </a:t>
+            </a:r>
+            <a:r>
+              <a:rPr lang="es-ES" spc="165" dirty="0" err="1">
+                <a:latin typeface="Arial"/>
+                <a:cs typeface="Arial"/>
+              </a:rPr>
+              <a:t>Nàcher</a:t>
+            </a:r>
+            <a:r>
+              <a:rPr lang="es-ES" spc="165" dirty="0">
+                <a:latin typeface="Arial"/>
+                <a:cs typeface="Arial"/>
+              </a:rPr>
+              <a:t> Muñoz</a:t>
             </a:r>
             <a:endParaRPr sz="1800" dirty="0">
               <a:latin typeface="Arial"/>
@@ -5850,6 +5865,500 @@
   <p:cSld>
     <p:spTree>
       <p:nvGrpSpPr>
+        <p:cNvPr id="1" name=""/>
+        <p:cNvGrpSpPr/>
+        <p:nvPr/>
+      </p:nvGrpSpPr>
+      <p:grpSpPr>
+        <a:xfrm>
+          <a:off x="0" y="0"/>
+          <a:ext cx="0" cy="0"/>
+          <a:chOff x="0" y="0"/>
+          <a:chExt cx="0" cy="0"/>
+        </a:xfrm>
+      </p:grpSpPr>
+      <p:sp>
+        <p:nvSpPr>
+          <p:cNvPr id="2" name="Título 1">
+            <a:extLst>
+              <a:ext uri="{FF2B5EF4-FFF2-40B4-BE49-F238E27FC236}">
+                <a16:creationId xmlns:a16="http://schemas.microsoft.com/office/drawing/2014/main" id="{B03F3B83-8AE9-4086-925C-01535FA22BD0}"/>
+              </a:ext>
+            </a:extLst>
+          </p:cNvPr>
+          <p:cNvSpPr>
+            <a:spLocks noGrp="1"/>
+          </p:cNvSpPr>
+          <p:nvPr>
+            <p:ph type="title"/>
+          </p:nvPr>
+        </p:nvSpPr>
+        <p:spPr>
+          <a:xfrm>
+            <a:off x="590550" y="206752"/>
+            <a:ext cx="10991850" cy="615553"/>
+          </a:xfrm>
+        </p:spPr>
+        <p:txBody>
+          <a:bodyPr/>
+          <a:lstStyle/>
+          <a:p>
+            <a:r>
+              <a:rPr lang="en-US" sz="2000" dirty="0"/>
+              <a:t>Learning outcome #1 – Effective index of a waveguide</a:t>
+            </a:r>
+            <a:br>
+              <a:rPr lang="es-ES" sz="2000" spc="-5" dirty="0">
+                <a:latin typeface="+mj-lt"/>
+                <a:cs typeface="Lucida Sans"/>
+              </a:rPr>
+            </a:br>
+            <a:endParaRPr lang="es-ES" dirty="0"/>
+          </a:p>
+        </p:txBody>
+      </p:sp>
+      <p:sp>
+        <p:nvSpPr>
+          <p:cNvPr id="3" name="Marcador de texto 2">
+            <a:extLst>
+              <a:ext uri="{FF2B5EF4-FFF2-40B4-BE49-F238E27FC236}">
+                <a16:creationId xmlns:a16="http://schemas.microsoft.com/office/drawing/2014/main" id="{D50FC1E5-A8C4-4616-B0CE-408D93AAA026}"/>
+              </a:ext>
+            </a:extLst>
+          </p:cNvPr>
+          <p:cNvSpPr>
+            <a:spLocks noGrp="1"/>
+          </p:cNvSpPr>
+          <p:nvPr>
+            <p:ph type="body" idx="1"/>
+          </p:nvPr>
+        </p:nvSpPr>
+        <p:spPr>
+          <a:xfrm>
+            <a:off x="618067" y="1313821"/>
+            <a:ext cx="10744200" cy="553998"/>
+          </a:xfrm>
+        </p:spPr>
+        <p:txBody>
+          <a:bodyPr/>
+          <a:lstStyle/>
+          <a:p>
+            <a:r>
+              <a:rPr lang="es-ES" sz="1200" dirty="0"/>
+              <a:t>Podemos observar que hay 3 modos que se propagan. El índice efectivo de la cuarta componente es inferior al índice efectivo del </a:t>
+            </a:r>
+            <a:r>
+              <a:rPr lang="es-ES" sz="1200" dirty="0" err="1"/>
+              <a:t>cladding</a:t>
+            </a:r>
+            <a:r>
+              <a:rPr lang="es-ES" sz="1200" dirty="0"/>
+              <a:t> (1.44), por lo que ese modo no se propagará.</a:t>
+            </a:r>
+          </a:p>
+          <a:p>
+            <a:endParaRPr lang="es-ES" sz="1200" dirty="0"/>
+          </a:p>
+        </p:txBody>
+      </p:sp>
+      <p:sp>
+        <p:nvSpPr>
+          <p:cNvPr id="4" name="Marcador de pie de página 3">
+            <a:extLst>
+              <a:ext uri="{FF2B5EF4-FFF2-40B4-BE49-F238E27FC236}">
+                <a16:creationId xmlns:a16="http://schemas.microsoft.com/office/drawing/2014/main" id="{A3AF6718-937C-48A5-BA90-0EC438DB4305}"/>
+              </a:ext>
+            </a:extLst>
+          </p:cNvPr>
+          <p:cNvSpPr>
+            <a:spLocks noGrp="1"/>
+          </p:cNvSpPr>
+          <p:nvPr>
+            <p:ph type="ftr" sz="quarter" idx="5"/>
+          </p:nvPr>
+        </p:nvSpPr>
+        <p:spPr/>
+        <p:txBody>
+          <a:bodyPr/>
+          <a:lstStyle/>
+          <a:p>
+            <a:pPr marL="12700">
+              <a:spcBef>
+                <a:spcPts val="15"/>
+              </a:spcBef>
+            </a:pPr>
+            <a:r>
+              <a:rPr lang="es-ES" spc="-5"/>
+              <a:t>LAB 0.1. MODESOLVER</a:t>
+            </a:r>
+            <a:endParaRPr lang="es-ES" spc="-5" dirty="0"/>
+          </a:p>
+        </p:txBody>
+      </p:sp>
+      <p:sp>
+        <p:nvSpPr>
+          <p:cNvPr id="5" name="Marcador de número de diapositiva 4">
+            <a:extLst>
+              <a:ext uri="{FF2B5EF4-FFF2-40B4-BE49-F238E27FC236}">
+                <a16:creationId xmlns:a16="http://schemas.microsoft.com/office/drawing/2014/main" id="{33FCF10C-59B4-4245-8DAF-1DC825C1094E}"/>
+              </a:ext>
+            </a:extLst>
+          </p:cNvPr>
+          <p:cNvSpPr>
+            <a:spLocks noGrp="1"/>
+          </p:cNvSpPr>
+          <p:nvPr>
+            <p:ph type="sldNum" sz="quarter" idx="7"/>
+          </p:nvPr>
+        </p:nvSpPr>
+        <p:spPr/>
+        <p:txBody>
+          <a:bodyPr/>
+          <a:lstStyle/>
+          <a:p>
+            <a:fld id="{B6F15528-21DE-4FAA-801E-634DDDAF4B2B}" type="slidenum">
+              <a:rPr lang="es-ES" smtClean="0"/>
+              <a:t>4</a:t>
+            </a:fld>
+            <a:endParaRPr lang="es-ES"/>
+          </a:p>
+        </p:txBody>
+      </p:sp>
+      <p:pic>
+        <p:nvPicPr>
+          <p:cNvPr id="11" name="Imagen 10">
+            <a:extLst>
+              <a:ext uri="{FF2B5EF4-FFF2-40B4-BE49-F238E27FC236}">
+                <a16:creationId xmlns:a16="http://schemas.microsoft.com/office/drawing/2014/main" id="{745C5713-9FF8-4F24-B3A1-01DBDE5BFBB6}"/>
+              </a:ext>
+            </a:extLst>
+          </p:cNvPr>
+          <p:cNvPicPr>
+            <a:picLocks noChangeAspect="1"/>
+          </p:cNvPicPr>
+          <p:nvPr/>
+        </p:nvPicPr>
+        <p:blipFill>
+          <a:blip r:embed="rId2"/>
+          <a:stretch>
+            <a:fillRect/>
+          </a:stretch>
+        </p:blipFill>
+        <p:spPr>
+          <a:xfrm>
+            <a:off x="4114800" y="781079"/>
+            <a:ext cx="3505200" cy="361191"/>
+          </a:xfrm>
+          <a:prstGeom prst="rect">
+            <a:avLst/>
+          </a:prstGeom>
+        </p:spPr>
+      </p:pic>
+      <p:sp>
+        <p:nvSpPr>
+          <p:cNvPr id="13" name="CuadroTexto 12">
+            <a:extLst>
+              <a:ext uri="{FF2B5EF4-FFF2-40B4-BE49-F238E27FC236}">
+                <a16:creationId xmlns:a16="http://schemas.microsoft.com/office/drawing/2014/main" id="{4C2F61D6-3BA7-4913-A71A-F598C2037723}"/>
+              </a:ext>
+            </a:extLst>
+          </p:cNvPr>
+          <p:cNvSpPr txBox="1"/>
+          <p:nvPr/>
+        </p:nvSpPr>
+        <p:spPr>
+          <a:xfrm>
+            <a:off x="3712211" y="2316855"/>
+            <a:ext cx="6125632" cy="276999"/>
+          </a:xfrm>
+          <a:prstGeom prst="rect">
+            <a:avLst/>
+          </a:prstGeom>
+          <a:noFill/>
+        </p:spPr>
+        <p:txBody>
+          <a:bodyPr wrap="square">
+            <a:spAutoFit/>
+          </a:bodyPr>
+          <a:lstStyle/>
+          <a:p>
+            <a:r>
+              <a:rPr lang="es-ES" sz="1200" dirty="0"/>
+              <a:t>Los modos 0 y 2 corresponden a modos TE y los modos 1 y 3 a modos TM.</a:t>
+            </a:r>
+          </a:p>
+        </p:txBody>
+      </p:sp>
+      <p:sp>
+        <p:nvSpPr>
+          <p:cNvPr id="14" name="CuadroTexto 13">
+            <a:extLst>
+              <a:ext uri="{FF2B5EF4-FFF2-40B4-BE49-F238E27FC236}">
+                <a16:creationId xmlns:a16="http://schemas.microsoft.com/office/drawing/2014/main" id="{D21517BF-BA73-4A65-81AF-02FB13FB8A2B}"/>
+              </a:ext>
+            </a:extLst>
+          </p:cNvPr>
+          <p:cNvSpPr txBox="1"/>
+          <p:nvPr/>
+        </p:nvSpPr>
+        <p:spPr>
+          <a:xfrm>
+            <a:off x="533400" y="815984"/>
+            <a:ext cx="4210050" cy="276999"/>
+          </a:xfrm>
+          <a:prstGeom prst="rect">
+            <a:avLst/>
+          </a:prstGeom>
+          <a:noFill/>
+        </p:spPr>
+        <p:txBody>
+          <a:bodyPr wrap="square" rtlCol="0">
+            <a:spAutoFit/>
+          </a:bodyPr>
+          <a:lstStyle/>
+          <a:p>
+            <a:r>
+              <a:rPr lang="es-ES" sz="1200" dirty="0"/>
+              <a:t>Índice efectivo de los cuatro primeros modos:</a:t>
+            </a:r>
+          </a:p>
+        </p:txBody>
+      </p:sp>
+      <p:pic>
+        <p:nvPicPr>
+          <p:cNvPr id="16" name="Imagen 15">
+            <a:extLst>
+              <a:ext uri="{FF2B5EF4-FFF2-40B4-BE49-F238E27FC236}">
+                <a16:creationId xmlns:a16="http://schemas.microsoft.com/office/drawing/2014/main" id="{5DB2889D-FF9E-433F-AB28-83223F649F7F}"/>
+              </a:ext>
+            </a:extLst>
+          </p:cNvPr>
+          <p:cNvPicPr>
+            <a:picLocks noChangeAspect="1"/>
+          </p:cNvPicPr>
+          <p:nvPr/>
+        </p:nvPicPr>
+        <p:blipFill>
+          <a:blip r:embed="rId3"/>
+          <a:stretch>
+            <a:fillRect/>
+          </a:stretch>
+        </p:blipFill>
+        <p:spPr>
+          <a:xfrm>
+            <a:off x="618746" y="1821658"/>
+            <a:ext cx="2590121" cy="1260526"/>
+          </a:xfrm>
+          <a:prstGeom prst="rect">
+            <a:avLst/>
+          </a:prstGeom>
+        </p:spPr>
+      </p:pic>
+      <p:pic>
+        <p:nvPicPr>
+          <p:cNvPr id="18" name="Imagen 17">
+            <a:extLst>
+              <a:ext uri="{FF2B5EF4-FFF2-40B4-BE49-F238E27FC236}">
+                <a16:creationId xmlns:a16="http://schemas.microsoft.com/office/drawing/2014/main" id="{EC5F2DA8-2FDA-4ABD-B3FE-58B77A57A775}"/>
+              </a:ext>
+            </a:extLst>
+          </p:cNvPr>
+          <p:cNvPicPr>
+            <a:picLocks noChangeAspect="1"/>
+          </p:cNvPicPr>
+          <p:nvPr/>
+        </p:nvPicPr>
+        <p:blipFill>
+          <a:blip r:embed="rId4"/>
+          <a:stretch>
+            <a:fillRect/>
+          </a:stretch>
+        </p:blipFill>
+        <p:spPr>
+          <a:xfrm>
+            <a:off x="3502555" y="3088196"/>
+            <a:ext cx="2447924" cy="1647479"/>
+          </a:xfrm>
+          <a:prstGeom prst="rect">
+            <a:avLst/>
+          </a:prstGeom>
+        </p:spPr>
+      </p:pic>
+      <p:pic>
+        <p:nvPicPr>
+          <p:cNvPr id="20" name="Imagen 19">
+            <a:extLst>
+              <a:ext uri="{FF2B5EF4-FFF2-40B4-BE49-F238E27FC236}">
+                <a16:creationId xmlns:a16="http://schemas.microsoft.com/office/drawing/2014/main" id="{0802046A-6161-487D-918F-CEADD8B5C022}"/>
+              </a:ext>
+            </a:extLst>
+          </p:cNvPr>
+          <p:cNvPicPr>
+            <a:picLocks noChangeAspect="1"/>
+          </p:cNvPicPr>
+          <p:nvPr/>
+        </p:nvPicPr>
+        <p:blipFill>
+          <a:blip r:embed="rId5"/>
+          <a:stretch>
+            <a:fillRect/>
+          </a:stretch>
+        </p:blipFill>
+        <p:spPr>
+          <a:xfrm>
+            <a:off x="8970964" y="3042890"/>
+            <a:ext cx="2447925" cy="1647479"/>
+          </a:xfrm>
+          <a:prstGeom prst="rect">
+            <a:avLst/>
+          </a:prstGeom>
+        </p:spPr>
+      </p:pic>
+      <p:pic>
+        <p:nvPicPr>
+          <p:cNvPr id="22" name="Imagen 21">
+            <a:extLst>
+              <a:ext uri="{FF2B5EF4-FFF2-40B4-BE49-F238E27FC236}">
+                <a16:creationId xmlns:a16="http://schemas.microsoft.com/office/drawing/2014/main" id="{6FBA303D-2A6B-4166-B4D6-0145C2D99CF6}"/>
+              </a:ext>
+            </a:extLst>
+          </p:cNvPr>
+          <p:cNvPicPr>
+            <a:picLocks noChangeAspect="1"/>
+          </p:cNvPicPr>
+          <p:nvPr/>
+        </p:nvPicPr>
+        <p:blipFill>
+          <a:blip r:embed="rId6"/>
+          <a:stretch>
+            <a:fillRect/>
+          </a:stretch>
+        </p:blipFill>
+        <p:spPr>
+          <a:xfrm>
+            <a:off x="3502085" y="4901911"/>
+            <a:ext cx="2448394" cy="1647479"/>
+          </a:xfrm>
+          <a:prstGeom prst="rect">
+            <a:avLst/>
+          </a:prstGeom>
+        </p:spPr>
+      </p:pic>
+      <p:pic>
+        <p:nvPicPr>
+          <p:cNvPr id="24" name="Imagen 23">
+            <a:extLst>
+              <a:ext uri="{FF2B5EF4-FFF2-40B4-BE49-F238E27FC236}">
+                <a16:creationId xmlns:a16="http://schemas.microsoft.com/office/drawing/2014/main" id="{B651E258-1CFD-43D3-949B-1FE4691264BE}"/>
+              </a:ext>
+            </a:extLst>
+          </p:cNvPr>
+          <p:cNvPicPr>
+            <a:picLocks noChangeAspect="1"/>
+          </p:cNvPicPr>
+          <p:nvPr/>
+        </p:nvPicPr>
+        <p:blipFill>
+          <a:blip r:embed="rId7"/>
+          <a:stretch>
+            <a:fillRect/>
+          </a:stretch>
+        </p:blipFill>
+        <p:spPr>
+          <a:xfrm>
+            <a:off x="9029878" y="4919262"/>
+            <a:ext cx="2332389" cy="1537795"/>
+          </a:xfrm>
+          <a:prstGeom prst="rect">
+            <a:avLst/>
+          </a:prstGeom>
+        </p:spPr>
+      </p:pic>
+      <p:sp>
+        <p:nvSpPr>
+          <p:cNvPr id="26" name="CuadroTexto 25">
+            <a:extLst>
+              <a:ext uri="{FF2B5EF4-FFF2-40B4-BE49-F238E27FC236}">
+                <a16:creationId xmlns:a16="http://schemas.microsoft.com/office/drawing/2014/main" id="{F69B31BD-4171-4303-829D-1134EE10B9F0}"/>
+              </a:ext>
+            </a:extLst>
+          </p:cNvPr>
+          <p:cNvSpPr txBox="1"/>
+          <p:nvPr/>
+        </p:nvSpPr>
+        <p:spPr>
+          <a:xfrm>
+            <a:off x="607483" y="5043379"/>
+            <a:ext cx="2762250" cy="1143000"/>
+          </a:xfrm>
+          <a:prstGeom prst="rect">
+            <a:avLst/>
+          </a:prstGeom>
+          <a:noFill/>
+        </p:spPr>
+        <p:txBody>
+          <a:bodyPr wrap="square" rtlCol="0">
+            <a:spAutoFit/>
+          </a:bodyPr>
+          <a:lstStyle/>
+          <a:p>
+            <a:endParaRPr lang="es-ES" dirty="0"/>
+          </a:p>
+        </p:txBody>
+      </p:sp>
+      <p:sp>
+        <p:nvSpPr>
+          <p:cNvPr id="27" name="CuadroTexto 26">
+            <a:extLst>
+              <a:ext uri="{FF2B5EF4-FFF2-40B4-BE49-F238E27FC236}">
+                <a16:creationId xmlns:a16="http://schemas.microsoft.com/office/drawing/2014/main" id="{79787E3E-0762-421A-809A-3021A06058B1}"/>
+              </a:ext>
+            </a:extLst>
+          </p:cNvPr>
+          <p:cNvSpPr txBox="1"/>
+          <p:nvPr/>
+        </p:nvSpPr>
+        <p:spPr>
+          <a:xfrm>
+            <a:off x="590550" y="3429000"/>
+            <a:ext cx="2762250" cy="276999"/>
+          </a:xfrm>
+          <a:prstGeom prst="rect">
+            <a:avLst/>
+          </a:prstGeom>
+          <a:noFill/>
+        </p:spPr>
+        <p:txBody>
+          <a:bodyPr wrap="square" rtlCol="0">
+            <a:spAutoFit/>
+          </a:bodyPr>
+          <a:lstStyle/>
+          <a:p>
+            <a:r>
+              <a:rPr lang="es-ES" sz="1200" dirty="0"/>
+              <a:t>Modo 0 (TE).</a:t>
+            </a:r>
+          </a:p>
+        </p:txBody>
+      </p:sp>
+    </p:spTree>
+    <p:extLst>
+      <p:ext uri="{BB962C8B-B14F-4D97-AF65-F5344CB8AC3E}">
+        <p14:creationId xmlns:p14="http://schemas.microsoft.com/office/powerpoint/2010/main" val="613648148"/>
+      </p:ext>
+    </p:extLst>
+  </p:cSld>
+  <p:clrMapOvr>
+    <a:masterClrMapping/>
+  </p:clrMapOvr>
+</p:sld>
+</file>
+
+<file path=ppt/slides/slide5.xml><?xml version="1.0" encoding="utf-8"?>
+<p:sld xmlns:a="http://schemas.openxmlformats.org/drawingml/2006/main" xmlns:r="http://schemas.openxmlformats.org/officeDocument/2006/relationships" xmlns:p="http://schemas.openxmlformats.org/presentationml/2006/main">
+  <p:cSld>
+    <p:spTree>
+      <p:nvGrpSpPr>
         <p:cNvPr id="1" name="">
           <a:extLst>
             <a:ext uri="{FF2B5EF4-FFF2-40B4-BE49-F238E27FC236}">
@@ -5987,7 +6496,7 @@
           <a:p>
             <a:fld id="{B6F15528-21DE-4FAA-801E-634DDDAF4B2B}" type="slidenum">
               <a:rPr lang="es-ES" smtClean="0"/>
-              <a:t>4</a:t>
+              <a:t>5</a:t>
             </a:fld>
             <a:endParaRPr lang="es-ES"/>
           </a:p>
@@ -6623,7 +7132,7 @@
 </p:sld>
 </file>
 
-<file path=ppt/slides/slide5.xml><?xml version="1.0" encoding="utf-8"?>
+<file path=ppt/slides/slide6.xml><?xml version="1.0" encoding="utf-8"?>
 <p:sld xmlns:a="http://schemas.openxmlformats.org/drawingml/2006/main" xmlns:r="http://schemas.openxmlformats.org/officeDocument/2006/relationships" xmlns:p="http://schemas.openxmlformats.org/presentationml/2006/main">
   <p:cSld>
     <p:spTree>
@@ -6762,7 +7271,7 @@
           <a:p>
             <a:fld id="{B6F15528-21DE-4FAA-801E-634DDDAF4B2B}" type="slidenum">
               <a:rPr lang="es-ES" smtClean="0"/>
-              <a:t>5</a:t>
+              <a:t>6</a:t>
             </a:fld>
             <a:endParaRPr lang="es-ES"/>
           </a:p>

--- a/LabBook_010.pptx
+++ b/LabBook_010.pptx
@@ -275,7 +275,7 @@
           <a:p>
             <a:fld id="{8438F8DC-35B0-48E6-A86E-42F1F08DD00F}" type="datetimeFigureOut">
               <a:rPr lang="es-ES" smtClean="0"/>
-              <a:t>02/03/2026</a:t>
+              <a:t>2/3/26</a:t>
             </a:fld>
             <a:endParaRPr lang="es-ES"/>
           </a:p>
@@ -452,7 +452,7 @@
           <a:p>
             <a:fld id="{FACBDC12-F39B-4B97-8F4D-6734F9D366FF}" type="datetimeFigureOut">
               <a:rPr lang="es-ES" smtClean="0"/>
-              <a:t>02/03/2026</a:t>
+              <a:t>2/3/26</a:t>
             </a:fld>
             <a:endParaRPr lang="es-ES"/>
           </a:p>
@@ -5963,40 +5963,6 @@
       </p:sp>
       <p:sp>
         <p:nvSpPr>
-          <p:cNvPr id="4" name="Marcador de pie de página 3">
-            <a:extLst>
-              <a:ext uri="{FF2B5EF4-FFF2-40B4-BE49-F238E27FC236}">
-                <a16:creationId xmlns:a16="http://schemas.microsoft.com/office/drawing/2014/main" id="{A3AF6718-937C-48A5-BA90-0EC438DB4305}"/>
-              </a:ext>
-            </a:extLst>
-          </p:cNvPr>
-          <p:cNvSpPr>
-            <a:spLocks noGrp="1"/>
-          </p:cNvSpPr>
-          <p:nvPr>
-            <p:ph type="ftr" sz="quarter" idx="5"/>
-          </p:nvPr>
-        </p:nvSpPr>
-        <p:spPr/>
-        <p:txBody>
-          <a:bodyPr/>
-          <a:lstStyle/>
-          <a:p>
-            <a:pPr marL="12700">
-              <a:spcBef>
-                <a:spcPts val="15"/>
-              </a:spcBef>
-            </a:pPr>
-            <a:r>
-              <a:rPr lang="es-ES" spc="-5"/>
-              <a:t>LAB 0.1. MODESOLVER</a:t>
-            </a:r>
-            <a:endParaRPr lang="es-ES" spc="-5" dirty="0"/>
-          </a:p>
-        </p:txBody>
-      </p:sp>
-      <p:sp>
-        <p:nvSpPr>
           <p:cNvPr id="5" name="Marcador de número de diapositiva 4">
             <a:extLst>
               <a:ext uri="{FF2B5EF4-FFF2-40B4-BE49-F238E27FC236}">
@@ -6206,7 +6172,7 @@
         </p:blipFill>
         <p:spPr>
           <a:xfrm>
-            <a:off x="8970964" y="3042890"/>
+            <a:off x="9311640" y="3042890"/>
             <a:ext cx="2447925" cy="1647479"/>
           </a:xfrm>
           <a:prstGeom prst="rect">
@@ -6266,7 +6232,7 @@
         </p:blipFill>
         <p:spPr>
           <a:xfrm>
-            <a:off x="9029878" y="4919262"/>
+            <a:off x="9472506" y="4956752"/>
             <a:ext cx="2332389" cy="1537795"/>
           </a:xfrm>
           <a:prstGeom prst="rect">
@@ -6276,10 +6242,10 @@
       </p:pic>
       <p:sp>
         <p:nvSpPr>
-          <p:cNvPr id="26" name="CuadroTexto 25">
+          <p:cNvPr id="27" name="CuadroTexto 26">
             <a:extLst>
               <a:ext uri="{FF2B5EF4-FFF2-40B4-BE49-F238E27FC236}">
-                <a16:creationId xmlns:a16="http://schemas.microsoft.com/office/drawing/2014/main" id="{F69B31BD-4171-4303-829D-1134EE10B9F0}"/>
+                <a16:creationId xmlns:a16="http://schemas.microsoft.com/office/drawing/2014/main" id="{79787E3E-0762-421A-809A-3021A06058B1}"/>
               </a:ext>
             </a:extLst>
           </p:cNvPr>
@@ -6288,8 +6254,8 @@
         </p:nvSpPr>
         <p:spPr>
           <a:xfrm>
-            <a:off x="607483" y="5043379"/>
-            <a:ext cx="2762250" cy="1143000"/>
+            <a:off x="533399" y="3263226"/>
+            <a:ext cx="2968685" cy="1384995"/>
           </a:xfrm>
           <a:prstGeom prst="rect">
             <a:avLst/>
@@ -6302,16 +6268,25 @@
           </a:bodyPr>
           <a:lstStyle/>
           <a:p>
-            <a:endParaRPr lang="es-ES" dirty="0"/>
-          </a:p>
-        </p:txBody>
-      </p:sp>
-      <p:sp>
-        <p:nvSpPr>
-          <p:cNvPr id="27" name="CuadroTexto 26">
+            <a:r>
+              <a:rPr lang="es-ES" sz="1200" b="1" dirty="0"/>
+              <a:t>Modo 0 (TE) </a:t>
+            </a:r>
+          </a:p>
+          <a:p>
+            <a:r>
+              <a:rPr lang="es-ES" sz="1200" dirty="0"/>
+              <a:t>Es el modo fundamental TE. Está altamente confinado en el centro de la guía, presentando un único lóbulo central de alta intensidad. Esto indica que la máxima intensidad del campo electromagnético viaja concentrada dentro del núcleo de la guía.</a:t>
+            </a:r>
+          </a:p>
+        </p:txBody>
+      </p:sp>
+      <p:sp>
+        <p:nvSpPr>
+          <p:cNvPr id="6" name="CuadroTexto 5">
             <a:extLst>
               <a:ext uri="{FF2B5EF4-FFF2-40B4-BE49-F238E27FC236}">
-                <a16:creationId xmlns:a16="http://schemas.microsoft.com/office/drawing/2014/main" id="{79787E3E-0762-421A-809A-3021A06058B1}"/>
+                <a16:creationId xmlns:a16="http://schemas.microsoft.com/office/drawing/2014/main" id="{107E3010-282F-F29D-D411-DF4BA24AB5C2}"/>
               </a:ext>
             </a:extLst>
           </p:cNvPr>
@@ -6320,8 +6295,8 @@
         </p:nvSpPr>
         <p:spPr>
           <a:xfrm>
-            <a:off x="590550" y="3429000"/>
-            <a:ext cx="2762250" cy="276999"/>
+            <a:off x="537619" y="4845064"/>
+            <a:ext cx="2971800" cy="1754326"/>
           </a:xfrm>
           <a:prstGeom prst="rect">
             <a:avLst/>
@@ -6335,8 +6310,112 @@
           <a:lstStyle/>
           <a:p>
             <a:r>
+              <a:rPr lang="es-ES" sz="1200" b="1" dirty="0"/>
+              <a:t>Modo 2 (TE)</a:t>
+            </a:r>
+          </a:p>
+          <a:p>
+            <a:r>
               <a:rPr lang="es-ES" sz="1200" dirty="0"/>
-              <a:t>Modo 0 (TE).</a:t>
+              <a:t>Es un modo de orden superior. A diferencia del modo 0, presenta dos lóbulos distintos (uno rojo y uno azul) distribuidos horizontalmente, lo que indica un cambio de fase de 180º entre ellos. El campo electromagnético se extiende más hacia el </a:t>
+            </a:r>
+            <a:r>
+              <a:rPr lang="es-ES" sz="1200" dirty="0" err="1"/>
+              <a:t>cladding</a:t>
+            </a:r>
+            <a:r>
+              <a:rPr lang="es-ES" sz="1200" dirty="0"/>
+              <a:t>, por lo que está menos confinado que el modo fundamental.</a:t>
+            </a:r>
+          </a:p>
+        </p:txBody>
+      </p:sp>
+      <p:sp>
+        <p:nvSpPr>
+          <p:cNvPr id="8" name="CuadroTexto 7">
+            <a:extLst>
+              <a:ext uri="{FF2B5EF4-FFF2-40B4-BE49-F238E27FC236}">
+                <a16:creationId xmlns:a16="http://schemas.microsoft.com/office/drawing/2014/main" id="{627AC1D5-E6AA-26F9-7707-F008851EE7DB}"/>
+              </a:ext>
+            </a:extLst>
+          </p:cNvPr>
+          <p:cNvSpPr txBox="1"/>
+          <p:nvPr/>
+        </p:nvSpPr>
+        <p:spPr>
+          <a:xfrm>
+            <a:off x="6369580" y="3253133"/>
+            <a:ext cx="2762250" cy="1384995"/>
+          </a:xfrm>
+          <a:prstGeom prst="rect">
+            <a:avLst/>
+          </a:prstGeom>
+          <a:noFill/>
+        </p:spPr>
+        <p:txBody>
+          <a:bodyPr wrap="square" rtlCol="0">
+            <a:spAutoFit/>
+          </a:bodyPr>
+          <a:lstStyle/>
+          <a:p>
+            <a:r>
+              <a:rPr lang="es-ES" sz="1200" b="1" dirty="0"/>
+              <a:t>Modo 1 (TM)</a:t>
+            </a:r>
+          </a:p>
+          <a:p>
+            <a:r>
+              <a:rPr lang="es-ES" sz="1200" dirty="0"/>
+              <a:t>Corresponde al modo fundamental TM. Al igual que el modo 0, está fuertemente confinado en la estructura geométrica. Muestra un solo lóbulo principal en la distribución del campo, pero con polarización magnética transversal.</a:t>
+            </a:r>
+          </a:p>
+        </p:txBody>
+      </p:sp>
+      <p:sp>
+        <p:nvSpPr>
+          <p:cNvPr id="9" name="CuadroTexto 8">
+            <a:extLst>
+              <a:ext uri="{FF2B5EF4-FFF2-40B4-BE49-F238E27FC236}">
+                <a16:creationId xmlns:a16="http://schemas.microsoft.com/office/drawing/2014/main" id="{20CA2996-5FED-857C-1794-F03462812B05}"/>
+              </a:ext>
+            </a:extLst>
+          </p:cNvPr>
+          <p:cNvSpPr txBox="1"/>
+          <p:nvPr/>
+        </p:nvSpPr>
+        <p:spPr>
+          <a:xfrm>
+            <a:off x="6369580" y="4845064"/>
+            <a:ext cx="3102926" cy="1569660"/>
+          </a:xfrm>
+          <a:prstGeom prst="rect">
+            <a:avLst/>
+          </a:prstGeom>
+          <a:noFill/>
+        </p:spPr>
+        <p:txBody>
+          <a:bodyPr wrap="square" rtlCol="0">
+            <a:spAutoFit/>
+          </a:bodyPr>
+          <a:lstStyle/>
+          <a:p>
+            <a:r>
+              <a:rPr lang="es-ES" sz="1200" b="1" dirty="0"/>
+              <a:t>Modo 3 (TM)</a:t>
+            </a:r>
+          </a:p>
+          <a:p>
+            <a:r>
+              <a:rPr lang="es-ES" sz="1200" dirty="0"/>
+              <a:t>Es un modo TM de orden superior con muy bajo confinamiento; el campo se dispersa por casi toda el área de simulación. Como se calculó arriba, su índice efectivo es inferior al del </a:t>
+            </a:r>
+            <a:r>
+              <a:rPr lang="es-ES" sz="1200" i="1" dirty="0" err="1"/>
+              <a:t>cladding</a:t>
+            </a:r>
+            <a:r>
+              <a:rPr lang="es-ES" sz="1200" dirty="0"/>
+              <a:t>, lo que significa que este modo está en corte y no se propagará (se comportará como un modo radiante).</a:t>
             </a:r>
           </a:p>
         </p:txBody>
@@ -6718,21 +6797,7 @@
                 <a:latin typeface="Arial" panose="020B0604020202020204" pitchFamily="34" charset="0"/>
                 <a:cs typeface="Arial" panose="020B0604020202020204" pitchFamily="34" charset="0"/>
               </a:rPr>
-              <a:t> se puede </a:t>
-            </a:r>
-            <a:r>
-              <a:rPr lang="es-ES_tradnl" sz="1100" dirty="0" err="1">
-                <a:latin typeface="Arial" panose="020B0604020202020204" pitchFamily="34" charset="0"/>
-                <a:cs typeface="Arial" panose="020B0604020202020204" pitchFamily="34" charset="0"/>
-              </a:rPr>
-              <a:t>observer</a:t>
-            </a:r>
-            <a:r>
-              <a:rPr lang="es-ES_tradnl" sz="1100" dirty="0">
-                <a:latin typeface="Arial" panose="020B0604020202020204" pitchFamily="34" charset="0"/>
-                <a:cs typeface="Arial" panose="020B0604020202020204" pitchFamily="34" charset="0"/>
-              </a:rPr>
-              <a:t> que hay dos modos que no se propagan, los correspondientes al índice 2 y 3 de la solución, los cuales corresponden a los modos de orden mayor. Esto es debido a que sus índices efectivos son inferiores a los del </a:t>
+              <a:t> se puede observar que hay dos modos que no se propagan, los correspondientes al índice 2 y 3 de la solución, los cuales corresponden a los modos de orden mayor. Esto es debido a que sus índices efectivos son inferiores a los del </a:t>
             </a:r>
             <a:r>
               <a:rPr lang="es-ES_tradnl" sz="1100" dirty="0" err="1">
@@ -6746,21 +6811,7 @@
                 <a:latin typeface="Arial" panose="020B0604020202020204" pitchFamily="34" charset="0"/>
                 <a:cs typeface="Arial" panose="020B0604020202020204" pitchFamily="34" charset="0"/>
               </a:rPr>
-              <a:t>, lo cual hace que </a:t>
-            </a:r>
-            <a:r>
-              <a:rPr lang="es-ES_tradnl" sz="1100" dirty="0" err="1">
-                <a:latin typeface="Arial" panose="020B0604020202020204" pitchFamily="34" charset="0"/>
-                <a:cs typeface="Arial" panose="020B0604020202020204" pitchFamily="34" charset="0"/>
-              </a:rPr>
-              <a:t>esten</a:t>
-            </a:r>
-            <a:r>
-              <a:rPr lang="es-ES_tradnl" sz="1100" dirty="0">
-                <a:latin typeface="Arial" panose="020B0604020202020204" pitchFamily="34" charset="0"/>
-                <a:cs typeface="Arial" panose="020B0604020202020204" pitchFamily="34" charset="0"/>
-              </a:rPr>
-              <a:t> en corte. Solo los modos de orden inferior (0 y 1), al tener un índice efectivo mayor, se propagarán adecuadamente al estar más confinados dentro del </a:t>
+              <a:t>, lo cual hace que estén en corte. Solo los modos de orden inferior (0 y 1), al tener un índice efectivo mayor, se propagarán adecuadamente al estar más confinados dentro del </a:t>
             </a:r>
             <a:r>
               <a:rPr lang="es-ES_tradnl" sz="1100" dirty="0" err="1">
